--- a/tools/FreeP.RenderCompare/corpus/02-autoshapes.pptx
+++ b/tools/FreeP.RenderCompare/corpus/02-autoshapes.pptx
@@ -129,7 +129,7 @@
           <p:cNvPr id="2" name="Title 1">
             <a:extLst>
               <a:ext uri="{FF2B5EF4-FFF2-40B4-BE49-F238E27FC236}">
-                <a16:creationId xmlns:a16="http://schemas.microsoft.com/office/drawing/2014/main" id="{C2D356BD-60C2-6154-0737-35D699A8B9B7}"/>
+                <a16:creationId xmlns:a16="http://schemas.microsoft.com/office/drawing/2014/main" id="{956FC4EF-4EC2-892F-64FF-ED6D2DCDB61E}"/>
               </a:ext>
             </a:extLst>
           </p:cNvPr>
@@ -166,7 +166,7 @@
           <p:cNvPr id="3" name="Subtitle 2">
             <a:extLst>
               <a:ext uri="{FF2B5EF4-FFF2-40B4-BE49-F238E27FC236}">
-                <a16:creationId xmlns:a16="http://schemas.microsoft.com/office/drawing/2014/main" id="{140C2BAB-520A-A077-1185-8104155FC79D}"/>
+                <a16:creationId xmlns:a16="http://schemas.microsoft.com/office/drawing/2014/main" id="{9C9B4CA5-B443-441B-2A95-407B987A998E}"/>
               </a:ext>
             </a:extLst>
           </p:cNvPr>
@@ -236,7 +236,7 @@
           <p:cNvPr id="4" name="Date Placeholder 3">
             <a:extLst>
               <a:ext uri="{FF2B5EF4-FFF2-40B4-BE49-F238E27FC236}">
-                <a16:creationId xmlns:a16="http://schemas.microsoft.com/office/drawing/2014/main" id="{F0FA3A21-2647-7E07-7116-F313D752FD21}"/>
+                <a16:creationId xmlns:a16="http://schemas.microsoft.com/office/drawing/2014/main" id="{0239DFD3-4581-DF8F-90CB-52F2360EE68C}"/>
               </a:ext>
             </a:extLst>
           </p:cNvPr>
@@ -252,7 +252,7 @@
           <a:bodyPr/>
           <a:lstStyle/>
           <a:p>
-            <a:fld id="{952AB204-8260-40C3-AB77-D365BA5872EA}" type="datetimeFigureOut">
+            <a:fld id="{3502B2AD-5CC1-4E7A-A146-BC9782E3E62B}" type="datetimeFigureOut">
               <a:rPr lang="en-US" smtClean="0"/>
               <a:t>6/25/2026</a:t>
             </a:fld>
@@ -265,7 +265,7 @@
           <p:cNvPr id="5" name="Footer Placeholder 4">
             <a:extLst>
               <a:ext uri="{FF2B5EF4-FFF2-40B4-BE49-F238E27FC236}">
-                <a16:creationId xmlns:a16="http://schemas.microsoft.com/office/drawing/2014/main" id="{1E97BA80-EB0E-037A-A622-14B5472710CC}"/>
+                <a16:creationId xmlns:a16="http://schemas.microsoft.com/office/drawing/2014/main" id="{B7FE8893-DC20-BFA8-F133-84537C425949}"/>
               </a:ext>
             </a:extLst>
           </p:cNvPr>
@@ -290,7 +290,7 @@
           <p:cNvPr id="6" name="Slide Number Placeholder 5">
             <a:extLst>
               <a:ext uri="{FF2B5EF4-FFF2-40B4-BE49-F238E27FC236}">
-                <a16:creationId xmlns:a16="http://schemas.microsoft.com/office/drawing/2014/main" id="{FD82587F-826C-8E9C-B9D8-B42D4AD52BB7}"/>
+                <a16:creationId xmlns:a16="http://schemas.microsoft.com/office/drawing/2014/main" id="{F3407B92-4268-1634-9F9D-8C13E54E25E2}"/>
               </a:ext>
             </a:extLst>
           </p:cNvPr>
@@ -306,7 +306,7 @@
           <a:bodyPr/>
           <a:lstStyle/>
           <a:p>
-            <a:fld id="{A12C5F40-C9F2-4D97-A957-83DC834DB8C4}" type="slidenum">
+            <a:fld id="{C803AEAB-6DBA-4094-9DB7-716E86827953}" type="slidenum">
               <a:rPr lang="en-US" smtClean="0"/>
               <a:t>‹#›</a:t>
             </a:fld>
@@ -317,7 +317,7 @@
     </p:spTree>
     <p:extLst>
       <p:ext uri="{BB962C8B-B14F-4D97-AF65-F5344CB8AC3E}">
-        <p14:creationId xmlns:p14="http://schemas.microsoft.com/office/powerpoint/2010/main" val="3019263795"/>
+        <p14:creationId xmlns:p14="http://schemas.microsoft.com/office/powerpoint/2010/main" val="3363610097"/>
       </p:ext>
     </p:extLst>
   </p:cSld>
@@ -349,7 +349,7 @@
           <p:cNvPr id="2" name="Title 1">
             <a:extLst>
               <a:ext uri="{FF2B5EF4-FFF2-40B4-BE49-F238E27FC236}">
-                <a16:creationId xmlns:a16="http://schemas.microsoft.com/office/drawing/2014/main" id="{D2F2B8F3-ADF5-7A56-738C-01459744094F}"/>
+                <a16:creationId xmlns:a16="http://schemas.microsoft.com/office/drawing/2014/main" id="{2BF2408F-7538-64AD-8E51-B089243FEA1C}"/>
               </a:ext>
             </a:extLst>
           </p:cNvPr>
@@ -377,7 +377,7 @@
           <p:cNvPr id="3" name="Vertical Text Placeholder 2">
             <a:extLst>
               <a:ext uri="{FF2B5EF4-FFF2-40B4-BE49-F238E27FC236}">
-                <a16:creationId xmlns:a16="http://schemas.microsoft.com/office/drawing/2014/main" id="{3189F8E1-51AD-09D4-EA86-97579C5CEA37}"/>
+                <a16:creationId xmlns:a16="http://schemas.microsoft.com/office/drawing/2014/main" id="{96C4D385-FCB6-D1C5-1FF2-5666587636AD}"/>
               </a:ext>
             </a:extLst>
           </p:cNvPr>
@@ -434,7 +434,7 @@
           <p:cNvPr id="4" name="Date Placeholder 3">
             <a:extLst>
               <a:ext uri="{FF2B5EF4-FFF2-40B4-BE49-F238E27FC236}">
-                <a16:creationId xmlns:a16="http://schemas.microsoft.com/office/drawing/2014/main" id="{A470145C-9AD0-F87C-60D8-AD6E172BB5CE}"/>
+                <a16:creationId xmlns:a16="http://schemas.microsoft.com/office/drawing/2014/main" id="{278330F1-3AC9-2785-9EE0-19DA799105FF}"/>
               </a:ext>
             </a:extLst>
           </p:cNvPr>
@@ -450,7 +450,7 @@
           <a:bodyPr/>
           <a:lstStyle/>
           <a:p>
-            <a:fld id="{952AB204-8260-40C3-AB77-D365BA5872EA}" type="datetimeFigureOut">
+            <a:fld id="{3502B2AD-5CC1-4E7A-A146-BC9782E3E62B}" type="datetimeFigureOut">
               <a:rPr lang="en-US" smtClean="0"/>
               <a:t>6/25/2026</a:t>
             </a:fld>
@@ -463,7 +463,7 @@
           <p:cNvPr id="5" name="Footer Placeholder 4">
             <a:extLst>
               <a:ext uri="{FF2B5EF4-FFF2-40B4-BE49-F238E27FC236}">
-                <a16:creationId xmlns:a16="http://schemas.microsoft.com/office/drawing/2014/main" id="{0BD1AB03-1926-AC53-59D9-E6FF794E9ABC}"/>
+                <a16:creationId xmlns:a16="http://schemas.microsoft.com/office/drawing/2014/main" id="{6A623302-EA8E-73D8-8109-D4FEB8DE7082}"/>
               </a:ext>
             </a:extLst>
           </p:cNvPr>
@@ -488,7 +488,7 @@
           <p:cNvPr id="6" name="Slide Number Placeholder 5">
             <a:extLst>
               <a:ext uri="{FF2B5EF4-FFF2-40B4-BE49-F238E27FC236}">
-                <a16:creationId xmlns:a16="http://schemas.microsoft.com/office/drawing/2014/main" id="{36FD9B61-D26D-466A-2C71-A90AC91938A0}"/>
+                <a16:creationId xmlns:a16="http://schemas.microsoft.com/office/drawing/2014/main" id="{BCD74D07-3C31-9081-69D3-6C8E346C6CAD}"/>
               </a:ext>
             </a:extLst>
           </p:cNvPr>
@@ -504,7 +504,7 @@
           <a:bodyPr/>
           <a:lstStyle/>
           <a:p>
-            <a:fld id="{A12C5F40-C9F2-4D97-A957-83DC834DB8C4}" type="slidenum">
+            <a:fld id="{C803AEAB-6DBA-4094-9DB7-716E86827953}" type="slidenum">
               <a:rPr lang="en-US" smtClean="0"/>
               <a:t>‹#›</a:t>
             </a:fld>
@@ -515,7 +515,7 @@
     </p:spTree>
     <p:extLst>
       <p:ext uri="{BB962C8B-B14F-4D97-AF65-F5344CB8AC3E}">
-        <p14:creationId xmlns:p14="http://schemas.microsoft.com/office/powerpoint/2010/main" val="2982057548"/>
+        <p14:creationId xmlns:p14="http://schemas.microsoft.com/office/powerpoint/2010/main" val="1223143425"/>
       </p:ext>
     </p:extLst>
   </p:cSld>
@@ -547,7 +547,7 @@
           <p:cNvPr id="2" name="Vertical Title 1">
             <a:extLst>
               <a:ext uri="{FF2B5EF4-FFF2-40B4-BE49-F238E27FC236}">
-                <a16:creationId xmlns:a16="http://schemas.microsoft.com/office/drawing/2014/main" id="{6B24C8AF-7A06-9E3F-C891-C1B8EEAF2713}"/>
+                <a16:creationId xmlns:a16="http://schemas.microsoft.com/office/drawing/2014/main" id="{EBC31459-194A-9EAB-30B0-4C2FA8CFF306}"/>
               </a:ext>
             </a:extLst>
           </p:cNvPr>
@@ -580,7 +580,7 @@
           <p:cNvPr id="3" name="Vertical Text Placeholder 2">
             <a:extLst>
               <a:ext uri="{FF2B5EF4-FFF2-40B4-BE49-F238E27FC236}">
-                <a16:creationId xmlns:a16="http://schemas.microsoft.com/office/drawing/2014/main" id="{5A34925F-01E3-87FE-AD0F-8025DAF223A5}"/>
+                <a16:creationId xmlns:a16="http://schemas.microsoft.com/office/drawing/2014/main" id="{69792118-466F-83BF-430F-C6184D1A8372}"/>
               </a:ext>
             </a:extLst>
           </p:cNvPr>
@@ -642,7 +642,7 @@
           <p:cNvPr id="4" name="Date Placeholder 3">
             <a:extLst>
               <a:ext uri="{FF2B5EF4-FFF2-40B4-BE49-F238E27FC236}">
-                <a16:creationId xmlns:a16="http://schemas.microsoft.com/office/drawing/2014/main" id="{12BAEEDF-478D-13A7-D4DE-D4F13F929FCB}"/>
+                <a16:creationId xmlns:a16="http://schemas.microsoft.com/office/drawing/2014/main" id="{C5A31CFF-35F1-B6E9-684B-0539715E8DBC}"/>
               </a:ext>
             </a:extLst>
           </p:cNvPr>
@@ -658,7 +658,7 @@
           <a:bodyPr/>
           <a:lstStyle/>
           <a:p>
-            <a:fld id="{952AB204-8260-40C3-AB77-D365BA5872EA}" type="datetimeFigureOut">
+            <a:fld id="{3502B2AD-5CC1-4E7A-A146-BC9782E3E62B}" type="datetimeFigureOut">
               <a:rPr lang="en-US" smtClean="0"/>
               <a:t>6/25/2026</a:t>
             </a:fld>
@@ -671,7 +671,7 @@
           <p:cNvPr id="5" name="Footer Placeholder 4">
             <a:extLst>
               <a:ext uri="{FF2B5EF4-FFF2-40B4-BE49-F238E27FC236}">
-                <a16:creationId xmlns:a16="http://schemas.microsoft.com/office/drawing/2014/main" id="{2673877E-3452-FA79-D835-40394735231B}"/>
+                <a16:creationId xmlns:a16="http://schemas.microsoft.com/office/drawing/2014/main" id="{A4641D74-7F32-D7AD-3B30-3CCBFB66565E}"/>
               </a:ext>
             </a:extLst>
           </p:cNvPr>
@@ -696,7 +696,7 @@
           <p:cNvPr id="6" name="Slide Number Placeholder 5">
             <a:extLst>
               <a:ext uri="{FF2B5EF4-FFF2-40B4-BE49-F238E27FC236}">
-                <a16:creationId xmlns:a16="http://schemas.microsoft.com/office/drawing/2014/main" id="{DF6D0429-5ED9-C8E8-7A61-1A40A7203A91}"/>
+                <a16:creationId xmlns:a16="http://schemas.microsoft.com/office/drawing/2014/main" id="{DA829B7D-3794-C58E-1A06-E11A69D4D8DC}"/>
               </a:ext>
             </a:extLst>
           </p:cNvPr>
@@ -712,7 +712,7 @@
           <a:bodyPr/>
           <a:lstStyle/>
           <a:p>
-            <a:fld id="{A12C5F40-C9F2-4D97-A957-83DC834DB8C4}" type="slidenum">
+            <a:fld id="{C803AEAB-6DBA-4094-9DB7-716E86827953}" type="slidenum">
               <a:rPr lang="en-US" smtClean="0"/>
               <a:t>‹#›</a:t>
             </a:fld>
@@ -723,7 +723,7 @@
     </p:spTree>
     <p:extLst>
       <p:ext uri="{BB962C8B-B14F-4D97-AF65-F5344CB8AC3E}">
-        <p14:creationId xmlns:p14="http://schemas.microsoft.com/office/powerpoint/2010/main" val="577914288"/>
+        <p14:creationId xmlns:p14="http://schemas.microsoft.com/office/powerpoint/2010/main" val="3420413778"/>
       </p:ext>
     </p:extLst>
   </p:cSld>
@@ -755,7 +755,7 @@
           <p:cNvPr id="2" name="Title 1">
             <a:extLst>
               <a:ext uri="{FF2B5EF4-FFF2-40B4-BE49-F238E27FC236}">
-                <a16:creationId xmlns:a16="http://schemas.microsoft.com/office/drawing/2014/main" id="{55846D5A-2C96-16CE-2394-F2586118F05C}"/>
+                <a16:creationId xmlns:a16="http://schemas.microsoft.com/office/drawing/2014/main" id="{9F315EFC-3C1D-256B-0EDA-76018AB2497B}"/>
               </a:ext>
             </a:extLst>
           </p:cNvPr>
@@ -783,7 +783,7 @@
           <p:cNvPr id="3" name="Content Placeholder 2">
             <a:extLst>
               <a:ext uri="{FF2B5EF4-FFF2-40B4-BE49-F238E27FC236}">
-                <a16:creationId xmlns:a16="http://schemas.microsoft.com/office/drawing/2014/main" id="{8AC6577E-9C63-4E3B-CF69-DD44A35D0E41}"/>
+                <a16:creationId xmlns:a16="http://schemas.microsoft.com/office/drawing/2014/main" id="{7E306F31-A33D-D469-2C54-0736A217EC4C}"/>
               </a:ext>
             </a:extLst>
           </p:cNvPr>
@@ -840,7 +840,7 @@
           <p:cNvPr id="4" name="Date Placeholder 3">
             <a:extLst>
               <a:ext uri="{FF2B5EF4-FFF2-40B4-BE49-F238E27FC236}">
-                <a16:creationId xmlns:a16="http://schemas.microsoft.com/office/drawing/2014/main" id="{CB474520-C465-228D-2349-4E7F318A2974}"/>
+                <a16:creationId xmlns:a16="http://schemas.microsoft.com/office/drawing/2014/main" id="{2575DA0D-F749-7782-FAF3-1AEF5609FF88}"/>
               </a:ext>
             </a:extLst>
           </p:cNvPr>
@@ -856,7 +856,7 @@
           <a:bodyPr/>
           <a:lstStyle/>
           <a:p>
-            <a:fld id="{952AB204-8260-40C3-AB77-D365BA5872EA}" type="datetimeFigureOut">
+            <a:fld id="{3502B2AD-5CC1-4E7A-A146-BC9782E3E62B}" type="datetimeFigureOut">
               <a:rPr lang="en-US" smtClean="0"/>
               <a:t>6/25/2026</a:t>
             </a:fld>
@@ -869,7 +869,7 @@
           <p:cNvPr id="5" name="Footer Placeholder 4">
             <a:extLst>
               <a:ext uri="{FF2B5EF4-FFF2-40B4-BE49-F238E27FC236}">
-                <a16:creationId xmlns:a16="http://schemas.microsoft.com/office/drawing/2014/main" id="{7EDCF26F-4B21-2AFD-D8CA-15AA863FE44A}"/>
+                <a16:creationId xmlns:a16="http://schemas.microsoft.com/office/drawing/2014/main" id="{08567E97-38D7-8B2B-E613-027794A2698F}"/>
               </a:ext>
             </a:extLst>
           </p:cNvPr>
@@ -894,7 +894,7 @@
           <p:cNvPr id="6" name="Slide Number Placeholder 5">
             <a:extLst>
               <a:ext uri="{FF2B5EF4-FFF2-40B4-BE49-F238E27FC236}">
-                <a16:creationId xmlns:a16="http://schemas.microsoft.com/office/drawing/2014/main" id="{E36EE3D8-4CF1-0DE3-B7C7-1A3DF52503CB}"/>
+                <a16:creationId xmlns:a16="http://schemas.microsoft.com/office/drawing/2014/main" id="{035AD76A-5569-7AAC-5018-54D000124794}"/>
               </a:ext>
             </a:extLst>
           </p:cNvPr>
@@ -910,7 +910,7 @@
           <a:bodyPr/>
           <a:lstStyle/>
           <a:p>
-            <a:fld id="{A12C5F40-C9F2-4D97-A957-83DC834DB8C4}" type="slidenum">
+            <a:fld id="{C803AEAB-6DBA-4094-9DB7-716E86827953}" type="slidenum">
               <a:rPr lang="en-US" smtClean="0"/>
               <a:t>‹#›</a:t>
             </a:fld>
@@ -921,7 +921,7 @@
     </p:spTree>
     <p:extLst>
       <p:ext uri="{BB962C8B-B14F-4D97-AF65-F5344CB8AC3E}">
-        <p14:creationId xmlns:p14="http://schemas.microsoft.com/office/powerpoint/2010/main" val="4092241180"/>
+        <p14:creationId xmlns:p14="http://schemas.microsoft.com/office/powerpoint/2010/main" val="233806399"/>
       </p:ext>
     </p:extLst>
   </p:cSld>
@@ -953,7 +953,7 @@
           <p:cNvPr id="2" name="Title 1">
             <a:extLst>
               <a:ext uri="{FF2B5EF4-FFF2-40B4-BE49-F238E27FC236}">
-                <a16:creationId xmlns:a16="http://schemas.microsoft.com/office/drawing/2014/main" id="{2CDAD706-9C10-991B-47F3-FC236F8B2651}"/>
+                <a16:creationId xmlns:a16="http://schemas.microsoft.com/office/drawing/2014/main" id="{8AC04DD1-C83A-EAD0-1416-F3DF404A6300}"/>
               </a:ext>
             </a:extLst>
           </p:cNvPr>
@@ -990,7 +990,7 @@
           <p:cNvPr id="3" name="Text Placeholder 2">
             <a:extLst>
               <a:ext uri="{FF2B5EF4-FFF2-40B4-BE49-F238E27FC236}">
-                <a16:creationId xmlns:a16="http://schemas.microsoft.com/office/drawing/2014/main" id="{E970FF4E-59C9-E6FA-14F5-A896C1860936}"/>
+                <a16:creationId xmlns:a16="http://schemas.microsoft.com/office/drawing/2014/main" id="{1F9EC3D3-30B5-C7C9-6C12-6BBCD33E8B76}"/>
               </a:ext>
             </a:extLst>
           </p:cNvPr>
@@ -1115,7 +1115,7 @@
           <p:cNvPr id="4" name="Date Placeholder 3">
             <a:extLst>
               <a:ext uri="{FF2B5EF4-FFF2-40B4-BE49-F238E27FC236}">
-                <a16:creationId xmlns:a16="http://schemas.microsoft.com/office/drawing/2014/main" id="{76B8D769-7BD1-07D5-3AB6-BCE719A760C1}"/>
+                <a16:creationId xmlns:a16="http://schemas.microsoft.com/office/drawing/2014/main" id="{8A5F1980-DC4D-51F2-1016-C960C2FA5F64}"/>
               </a:ext>
             </a:extLst>
           </p:cNvPr>
@@ -1131,7 +1131,7 @@
           <a:bodyPr/>
           <a:lstStyle/>
           <a:p>
-            <a:fld id="{952AB204-8260-40C3-AB77-D365BA5872EA}" type="datetimeFigureOut">
+            <a:fld id="{3502B2AD-5CC1-4E7A-A146-BC9782E3E62B}" type="datetimeFigureOut">
               <a:rPr lang="en-US" smtClean="0"/>
               <a:t>6/25/2026</a:t>
             </a:fld>
@@ -1144,7 +1144,7 @@
           <p:cNvPr id="5" name="Footer Placeholder 4">
             <a:extLst>
               <a:ext uri="{FF2B5EF4-FFF2-40B4-BE49-F238E27FC236}">
-                <a16:creationId xmlns:a16="http://schemas.microsoft.com/office/drawing/2014/main" id="{1D77BACF-5AF5-E646-A4B6-92AC053EC340}"/>
+                <a16:creationId xmlns:a16="http://schemas.microsoft.com/office/drawing/2014/main" id="{D4F641C4-CB4A-593B-6F72-C9E985A1ECF2}"/>
               </a:ext>
             </a:extLst>
           </p:cNvPr>
@@ -1169,7 +1169,7 @@
           <p:cNvPr id="6" name="Slide Number Placeholder 5">
             <a:extLst>
               <a:ext uri="{FF2B5EF4-FFF2-40B4-BE49-F238E27FC236}">
-                <a16:creationId xmlns:a16="http://schemas.microsoft.com/office/drawing/2014/main" id="{43B64518-3383-77FD-889D-9AE35D283976}"/>
+                <a16:creationId xmlns:a16="http://schemas.microsoft.com/office/drawing/2014/main" id="{5FBDCD16-610D-484A-41ED-03910B48E41C}"/>
               </a:ext>
             </a:extLst>
           </p:cNvPr>
@@ -1185,7 +1185,7 @@
           <a:bodyPr/>
           <a:lstStyle/>
           <a:p>
-            <a:fld id="{A12C5F40-C9F2-4D97-A957-83DC834DB8C4}" type="slidenum">
+            <a:fld id="{C803AEAB-6DBA-4094-9DB7-716E86827953}" type="slidenum">
               <a:rPr lang="en-US" smtClean="0"/>
               <a:t>‹#›</a:t>
             </a:fld>
@@ -1196,7 +1196,7 @@
     </p:spTree>
     <p:extLst>
       <p:ext uri="{BB962C8B-B14F-4D97-AF65-F5344CB8AC3E}">
-        <p14:creationId xmlns:p14="http://schemas.microsoft.com/office/powerpoint/2010/main" val="2302447421"/>
+        <p14:creationId xmlns:p14="http://schemas.microsoft.com/office/powerpoint/2010/main" val="449111464"/>
       </p:ext>
     </p:extLst>
   </p:cSld>
@@ -1228,7 +1228,7 @@
           <p:cNvPr id="2" name="Title 1">
             <a:extLst>
               <a:ext uri="{FF2B5EF4-FFF2-40B4-BE49-F238E27FC236}">
-                <a16:creationId xmlns:a16="http://schemas.microsoft.com/office/drawing/2014/main" id="{7F61B938-B77A-CFAE-59BA-2B2CFB4CFD0E}"/>
+                <a16:creationId xmlns:a16="http://schemas.microsoft.com/office/drawing/2014/main" id="{67940B17-B810-B0FB-C23E-43778CD46D74}"/>
               </a:ext>
             </a:extLst>
           </p:cNvPr>
@@ -1256,7 +1256,7 @@
           <p:cNvPr id="3" name="Content Placeholder 2">
             <a:extLst>
               <a:ext uri="{FF2B5EF4-FFF2-40B4-BE49-F238E27FC236}">
-                <a16:creationId xmlns:a16="http://schemas.microsoft.com/office/drawing/2014/main" id="{5ABB8B50-5F3C-A18E-BCCD-A577AB84B7DC}"/>
+                <a16:creationId xmlns:a16="http://schemas.microsoft.com/office/drawing/2014/main" id="{E9C783FC-A5DC-310B-022B-9DA0C78A65F6}"/>
               </a:ext>
             </a:extLst>
           </p:cNvPr>
@@ -1318,7 +1318,7 @@
           <p:cNvPr id="4" name="Content Placeholder 3">
             <a:extLst>
               <a:ext uri="{FF2B5EF4-FFF2-40B4-BE49-F238E27FC236}">
-                <a16:creationId xmlns:a16="http://schemas.microsoft.com/office/drawing/2014/main" id="{618EE9BC-56AF-5531-B738-CD5414F7DD18}"/>
+                <a16:creationId xmlns:a16="http://schemas.microsoft.com/office/drawing/2014/main" id="{E8B02696-E950-4B84-F116-BF2C42710163}"/>
               </a:ext>
             </a:extLst>
           </p:cNvPr>
@@ -1380,7 +1380,7 @@
           <p:cNvPr id="5" name="Date Placeholder 4">
             <a:extLst>
               <a:ext uri="{FF2B5EF4-FFF2-40B4-BE49-F238E27FC236}">
-                <a16:creationId xmlns:a16="http://schemas.microsoft.com/office/drawing/2014/main" id="{ABF63D1F-AF7B-CD14-615F-E2A002FDEAFA}"/>
+                <a16:creationId xmlns:a16="http://schemas.microsoft.com/office/drawing/2014/main" id="{0A730174-B3A2-7824-B54C-81397526FED5}"/>
               </a:ext>
             </a:extLst>
           </p:cNvPr>
@@ -1396,7 +1396,7 @@
           <a:bodyPr/>
           <a:lstStyle/>
           <a:p>
-            <a:fld id="{952AB204-8260-40C3-AB77-D365BA5872EA}" type="datetimeFigureOut">
+            <a:fld id="{3502B2AD-5CC1-4E7A-A146-BC9782E3E62B}" type="datetimeFigureOut">
               <a:rPr lang="en-US" smtClean="0"/>
               <a:t>6/25/2026</a:t>
             </a:fld>
@@ -1409,7 +1409,7 @@
           <p:cNvPr id="6" name="Footer Placeholder 5">
             <a:extLst>
               <a:ext uri="{FF2B5EF4-FFF2-40B4-BE49-F238E27FC236}">
-                <a16:creationId xmlns:a16="http://schemas.microsoft.com/office/drawing/2014/main" id="{854E7618-DCF2-AF76-F0FB-2CEBB6BE7DBB}"/>
+                <a16:creationId xmlns:a16="http://schemas.microsoft.com/office/drawing/2014/main" id="{50EDAB92-5D08-A583-70B5-5F1D6918CB61}"/>
               </a:ext>
             </a:extLst>
           </p:cNvPr>
@@ -1434,7 +1434,7 @@
           <p:cNvPr id="7" name="Slide Number Placeholder 6">
             <a:extLst>
               <a:ext uri="{FF2B5EF4-FFF2-40B4-BE49-F238E27FC236}">
-                <a16:creationId xmlns:a16="http://schemas.microsoft.com/office/drawing/2014/main" id="{5DF32142-A3BC-A7D5-8729-34914AE95374}"/>
+                <a16:creationId xmlns:a16="http://schemas.microsoft.com/office/drawing/2014/main" id="{E394486D-1D68-58BC-A5BC-7ABA004631D8}"/>
               </a:ext>
             </a:extLst>
           </p:cNvPr>
@@ -1450,7 +1450,7 @@
           <a:bodyPr/>
           <a:lstStyle/>
           <a:p>
-            <a:fld id="{A12C5F40-C9F2-4D97-A957-83DC834DB8C4}" type="slidenum">
+            <a:fld id="{C803AEAB-6DBA-4094-9DB7-716E86827953}" type="slidenum">
               <a:rPr lang="en-US" smtClean="0"/>
               <a:t>‹#›</a:t>
             </a:fld>
@@ -1461,7 +1461,7 @@
     </p:spTree>
     <p:extLst>
       <p:ext uri="{BB962C8B-B14F-4D97-AF65-F5344CB8AC3E}">
-        <p14:creationId xmlns:p14="http://schemas.microsoft.com/office/powerpoint/2010/main" val="819885312"/>
+        <p14:creationId xmlns:p14="http://schemas.microsoft.com/office/powerpoint/2010/main" val="3446650993"/>
       </p:ext>
     </p:extLst>
   </p:cSld>
@@ -1493,7 +1493,7 @@
           <p:cNvPr id="2" name="Title 1">
             <a:extLst>
               <a:ext uri="{FF2B5EF4-FFF2-40B4-BE49-F238E27FC236}">
-                <a16:creationId xmlns:a16="http://schemas.microsoft.com/office/drawing/2014/main" id="{A350EDBE-FA57-6A31-EF62-A1B0E01CE8FD}"/>
+                <a16:creationId xmlns:a16="http://schemas.microsoft.com/office/drawing/2014/main" id="{79FD87C2-89E0-9E08-D453-E7356462ABF7}"/>
               </a:ext>
             </a:extLst>
           </p:cNvPr>
@@ -1526,7 +1526,7 @@
           <p:cNvPr id="3" name="Text Placeholder 2">
             <a:extLst>
               <a:ext uri="{FF2B5EF4-FFF2-40B4-BE49-F238E27FC236}">
-                <a16:creationId xmlns:a16="http://schemas.microsoft.com/office/drawing/2014/main" id="{C56E1BFA-D611-5E5C-1DD8-B72FD0B9EEB7}"/>
+                <a16:creationId xmlns:a16="http://schemas.microsoft.com/office/drawing/2014/main" id="{462B6E93-A223-9D72-A999-104F502658DD}"/>
               </a:ext>
             </a:extLst>
           </p:cNvPr>
@@ -1597,7 +1597,7 @@
           <p:cNvPr id="4" name="Content Placeholder 3">
             <a:extLst>
               <a:ext uri="{FF2B5EF4-FFF2-40B4-BE49-F238E27FC236}">
-                <a16:creationId xmlns:a16="http://schemas.microsoft.com/office/drawing/2014/main" id="{426BB5DA-7840-10B5-2111-08B47BF9CAAB}"/>
+                <a16:creationId xmlns:a16="http://schemas.microsoft.com/office/drawing/2014/main" id="{07E5FFC1-17EA-42D7-DBC8-4E13C7061885}"/>
               </a:ext>
             </a:extLst>
           </p:cNvPr>
@@ -1659,7 +1659,7 @@
           <p:cNvPr id="5" name="Text Placeholder 4">
             <a:extLst>
               <a:ext uri="{FF2B5EF4-FFF2-40B4-BE49-F238E27FC236}">
-                <a16:creationId xmlns:a16="http://schemas.microsoft.com/office/drawing/2014/main" id="{8CDE6DE0-00D3-A2C5-69BC-0E3D224067E3}"/>
+                <a16:creationId xmlns:a16="http://schemas.microsoft.com/office/drawing/2014/main" id="{66804756-4CD3-5704-66A3-A4E90E43413E}"/>
               </a:ext>
             </a:extLst>
           </p:cNvPr>
@@ -1730,7 +1730,7 @@
           <p:cNvPr id="6" name="Content Placeholder 5">
             <a:extLst>
               <a:ext uri="{FF2B5EF4-FFF2-40B4-BE49-F238E27FC236}">
-                <a16:creationId xmlns:a16="http://schemas.microsoft.com/office/drawing/2014/main" id="{66226CF6-C716-5131-DD4A-581F4C56B6A4}"/>
+                <a16:creationId xmlns:a16="http://schemas.microsoft.com/office/drawing/2014/main" id="{A8676E87-8CEC-B338-076C-1D586EDB2960}"/>
               </a:ext>
             </a:extLst>
           </p:cNvPr>
@@ -1792,7 +1792,7 @@
           <p:cNvPr id="7" name="Date Placeholder 6">
             <a:extLst>
               <a:ext uri="{FF2B5EF4-FFF2-40B4-BE49-F238E27FC236}">
-                <a16:creationId xmlns:a16="http://schemas.microsoft.com/office/drawing/2014/main" id="{D857F053-9520-E4CD-94BD-3ED34E0B879D}"/>
+                <a16:creationId xmlns:a16="http://schemas.microsoft.com/office/drawing/2014/main" id="{8226E132-66D8-A9D8-C6D9-9CBDDB0B24F4}"/>
               </a:ext>
             </a:extLst>
           </p:cNvPr>
@@ -1808,7 +1808,7 @@
           <a:bodyPr/>
           <a:lstStyle/>
           <a:p>
-            <a:fld id="{952AB204-8260-40C3-AB77-D365BA5872EA}" type="datetimeFigureOut">
+            <a:fld id="{3502B2AD-5CC1-4E7A-A146-BC9782E3E62B}" type="datetimeFigureOut">
               <a:rPr lang="en-US" smtClean="0"/>
               <a:t>6/25/2026</a:t>
             </a:fld>
@@ -1821,7 +1821,7 @@
           <p:cNvPr id="8" name="Footer Placeholder 7">
             <a:extLst>
               <a:ext uri="{FF2B5EF4-FFF2-40B4-BE49-F238E27FC236}">
-                <a16:creationId xmlns:a16="http://schemas.microsoft.com/office/drawing/2014/main" id="{BB12B948-1C36-4211-6C63-D005A51CEBEF}"/>
+                <a16:creationId xmlns:a16="http://schemas.microsoft.com/office/drawing/2014/main" id="{19D019E5-FFEC-88B0-B274-3D0A16BA249D}"/>
               </a:ext>
             </a:extLst>
           </p:cNvPr>
@@ -1846,7 +1846,7 @@
           <p:cNvPr id="9" name="Slide Number Placeholder 8">
             <a:extLst>
               <a:ext uri="{FF2B5EF4-FFF2-40B4-BE49-F238E27FC236}">
-                <a16:creationId xmlns:a16="http://schemas.microsoft.com/office/drawing/2014/main" id="{424F4629-A2DE-E697-DD11-E8BC099342C5}"/>
+                <a16:creationId xmlns:a16="http://schemas.microsoft.com/office/drawing/2014/main" id="{D2108B91-7895-C341-2949-8FEDE543ADEE}"/>
               </a:ext>
             </a:extLst>
           </p:cNvPr>
@@ -1862,7 +1862,7 @@
           <a:bodyPr/>
           <a:lstStyle/>
           <a:p>
-            <a:fld id="{A12C5F40-C9F2-4D97-A957-83DC834DB8C4}" type="slidenum">
+            <a:fld id="{C803AEAB-6DBA-4094-9DB7-716E86827953}" type="slidenum">
               <a:rPr lang="en-US" smtClean="0"/>
               <a:t>‹#›</a:t>
             </a:fld>
@@ -1873,7 +1873,7 @@
     </p:spTree>
     <p:extLst>
       <p:ext uri="{BB962C8B-B14F-4D97-AF65-F5344CB8AC3E}">
-        <p14:creationId xmlns:p14="http://schemas.microsoft.com/office/powerpoint/2010/main" val="3855625254"/>
+        <p14:creationId xmlns:p14="http://schemas.microsoft.com/office/powerpoint/2010/main" val="1153658197"/>
       </p:ext>
     </p:extLst>
   </p:cSld>
@@ -1905,7 +1905,7 @@
           <p:cNvPr id="2" name="Title 1">
             <a:extLst>
               <a:ext uri="{FF2B5EF4-FFF2-40B4-BE49-F238E27FC236}">
-                <a16:creationId xmlns:a16="http://schemas.microsoft.com/office/drawing/2014/main" id="{E882B2A4-6053-5DAB-3E0D-968B0704CAC7}"/>
+                <a16:creationId xmlns:a16="http://schemas.microsoft.com/office/drawing/2014/main" id="{8B11BBED-83B9-82F3-BF99-3238D0AA1C5A}"/>
               </a:ext>
             </a:extLst>
           </p:cNvPr>
@@ -1933,7 +1933,7 @@
           <p:cNvPr id="3" name="Date Placeholder 2">
             <a:extLst>
               <a:ext uri="{FF2B5EF4-FFF2-40B4-BE49-F238E27FC236}">
-                <a16:creationId xmlns:a16="http://schemas.microsoft.com/office/drawing/2014/main" id="{57E196FF-B72C-2C9E-CB7D-EBE7FAEDCA5F}"/>
+                <a16:creationId xmlns:a16="http://schemas.microsoft.com/office/drawing/2014/main" id="{4D6CB48D-D59A-5056-E812-BD7D069B7364}"/>
               </a:ext>
             </a:extLst>
           </p:cNvPr>
@@ -1949,7 +1949,7 @@
           <a:bodyPr/>
           <a:lstStyle/>
           <a:p>
-            <a:fld id="{952AB204-8260-40C3-AB77-D365BA5872EA}" type="datetimeFigureOut">
+            <a:fld id="{3502B2AD-5CC1-4E7A-A146-BC9782E3E62B}" type="datetimeFigureOut">
               <a:rPr lang="en-US" smtClean="0"/>
               <a:t>6/25/2026</a:t>
             </a:fld>
@@ -1962,7 +1962,7 @@
           <p:cNvPr id="4" name="Footer Placeholder 3">
             <a:extLst>
               <a:ext uri="{FF2B5EF4-FFF2-40B4-BE49-F238E27FC236}">
-                <a16:creationId xmlns:a16="http://schemas.microsoft.com/office/drawing/2014/main" id="{52578769-715F-5D25-20F6-4BB79F60B6FD}"/>
+                <a16:creationId xmlns:a16="http://schemas.microsoft.com/office/drawing/2014/main" id="{D2DC3E1A-6C01-C623-009A-BCAEA392F1F2}"/>
               </a:ext>
             </a:extLst>
           </p:cNvPr>
@@ -1987,7 +1987,7 @@
           <p:cNvPr id="5" name="Slide Number Placeholder 4">
             <a:extLst>
               <a:ext uri="{FF2B5EF4-FFF2-40B4-BE49-F238E27FC236}">
-                <a16:creationId xmlns:a16="http://schemas.microsoft.com/office/drawing/2014/main" id="{CC0A4DC2-75D3-1B14-7403-1E38DF127A3F}"/>
+                <a16:creationId xmlns:a16="http://schemas.microsoft.com/office/drawing/2014/main" id="{6F273277-75C2-5011-03B4-A8B4F0C9384A}"/>
               </a:ext>
             </a:extLst>
           </p:cNvPr>
@@ -2003,7 +2003,7 @@
           <a:bodyPr/>
           <a:lstStyle/>
           <a:p>
-            <a:fld id="{A12C5F40-C9F2-4D97-A957-83DC834DB8C4}" type="slidenum">
+            <a:fld id="{C803AEAB-6DBA-4094-9DB7-716E86827953}" type="slidenum">
               <a:rPr lang="en-US" smtClean="0"/>
               <a:t>‹#›</a:t>
             </a:fld>
@@ -2014,7 +2014,7 @@
     </p:spTree>
     <p:extLst>
       <p:ext uri="{BB962C8B-B14F-4D97-AF65-F5344CB8AC3E}">
-        <p14:creationId xmlns:p14="http://schemas.microsoft.com/office/powerpoint/2010/main" val="2043035599"/>
+        <p14:creationId xmlns:p14="http://schemas.microsoft.com/office/powerpoint/2010/main" val="2761589868"/>
       </p:ext>
     </p:extLst>
   </p:cSld>
@@ -2046,7 +2046,7 @@
           <p:cNvPr id="2" name="Date Placeholder 1">
             <a:extLst>
               <a:ext uri="{FF2B5EF4-FFF2-40B4-BE49-F238E27FC236}">
-                <a16:creationId xmlns:a16="http://schemas.microsoft.com/office/drawing/2014/main" id="{2679BC4A-D2C7-EDF6-C599-EB837C0C646B}"/>
+                <a16:creationId xmlns:a16="http://schemas.microsoft.com/office/drawing/2014/main" id="{0E837290-D028-ED0B-CDA6-1E1179D2D91C}"/>
               </a:ext>
             </a:extLst>
           </p:cNvPr>
@@ -2062,7 +2062,7 @@
           <a:bodyPr/>
           <a:lstStyle/>
           <a:p>
-            <a:fld id="{952AB204-8260-40C3-AB77-D365BA5872EA}" type="datetimeFigureOut">
+            <a:fld id="{3502B2AD-5CC1-4E7A-A146-BC9782E3E62B}" type="datetimeFigureOut">
               <a:rPr lang="en-US" smtClean="0"/>
               <a:t>6/25/2026</a:t>
             </a:fld>
@@ -2075,7 +2075,7 @@
           <p:cNvPr id="3" name="Footer Placeholder 2">
             <a:extLst>
               <a:ext uri="{FF2B5EF4-FFF2-40B4-BE49-F238E27FC236}">
-                <a16:creationId xmlns:a16="http://schemas.microsoft.com/office/drawing/2014/main" id="{61A1EACA-28A0-630B-CDAF-32F3634E9EEE}"/>
+                <a16:creationId xmlns:a16="http://schemas.microsoft.com/office/drawing/2014/main" id="{05405762-9B64-46F9-8B3B-04D7478A5FE0}"/>
               </a:ext>
             </a:extLst>
           </p:cNvPr>
@@ -2100,7 +2100,7 @@
           <p:cNvPr id="4" name="Slide Number Placeholder 3">
             <a:extLst>
               <a:ext uri="{FF2B5EF4-FFF2-40B4-BE49-F238E27FC236}">
-                <a16:creationId xmlns:a16="http://schemas.microsoft.com/office/drawing/2014/main" id="{62098293-9304-9B2C-9413-DE1E07FECC6C}"/>
+                <a16:creationId xmlns:a16="http://schemas.microsoft.com/office/drawing/2014/main" id="{36A40E45-0A96-BDFB-3938-1BB2EB2D8FD6}"/>
               </a:ext>
             </a:extLst>
           </p:cNvPr>
@@ -2116,7 +2116,7 @@
           <a:bodyPr/>
           <a:lstStyle/>
           <a:p>
-            <a:fld id="{A12C5F40-C9F2-4D97-A957-83DC834DB8C4}" type="slidenum">
+            <a:fld id="{C803AEAB-6DBA-4094-9DB7-716E86827953}" type="slidenum">
               <a:rPr lang="en-US" smtClean="0"/>
               <a:t>‹#›</a:t>
             </a:fld>
@@ -2127,7 +2127,7 @@
     </p:spTree>
     <p:extLst>
       <p:ext uri="{BB962C8B-B14F-4D97-AF65-F5344CB8AC3E}">
-        <p14:creationId xmlns:p14="http://schemas.microsoft.com/office/powerpoint/2010/main" val="2252486898"/>
+        <p14:creationId xmlns:p14="http://schemas.microsoft.com/office/powerpoint/2010/main" val="3443035529"/>
       </p:ext>
     </p:extLst>
   </p:cSld>
@@ -2159,7 +2159,7 @@
           <p:cNvPr id="2" name="Title 1">
             <a:extLst>
               <a:ext uri="{FF2B5EF4-FFF2-40B4-BE49-F238E27FC236}">
-                <a16:creationId xmlns:a16="http://schemas.microsoft.com/office/drawing/2014/main" id="{975524B0-47F7-0973-B45B-09AD205C05C7}"/>
+                <a16:creationId xmlns:a16="http://schemas.microsoft.com/office/drawing/2014/main" id="{ED288BCB-A192-55BC-CEAE-2DC55A4D3708}"/>
               </a:ext>
             </a:extLst>
           </p:cNvPr>
@@ -2196,7 +2196,7 @@
           <p:cNvPr id="3" name="Content Placeholder 2">
             <a:extLst>
               <a:ext uri="{FF2B5EF4-FFF2-40B4-BE49-F238E27FC236}">
-                <a16:creationId xmlns:a16="http://schemas.microsoft.com/office/drawing/2014/main" id="{CC01868E-B4F8-B29D-CAF5-9B2828160AE5}"/>
+                <a16:creationId xmlns:a16="http://schemas.microsoft.com/office/drawing/2014/main" id="{59EA1D11-4080-F542-BB32-41061E942338}"/>
               </a:ext>
             </a:extLst>
           </p:cNvPr>
@@ -2286,7 +2286,7 @@
           <p:cNvPr id="4" name="Text Placeholder 3">
             <a:extLst>
               <a:ext uri="{FF2B5EF4-FFF2-40B4-BE49-F238E27FC236}">
-                <a16:creationId xmlns:a16="http://schemas.microsoft.com/office/drawing/2014/main" id="{791F3431-7F43-7D33-2405-DF7D2D83E7E8}"/>
+                <a16:creationId xmlns:a16="http://schemas.microsoft.com/office/drawing/2014/main" id="{21D605AD-9D02-2BB5-0D7F-649C3096EF25}"/>
               </a:ext>
             </a:extLst>
           </p:cNvPr>
@@ -2357,7 +2357,7 @@
           <p:cNvPr id="5" name="Date Placeholder 4">
             <a:extLst>
               <a:ext uri="{FF2B5EF4-FFF2-40B4-BE49-F238E27FC236}">
-                <a16:creationId xmlns:a16="http://schemas.microsoft.com/office/drawing/2014/main" id="{36F80C60-099B-1184-B4BD-1D4991BF8ED7}"/>
+                <a16:creationId xmlns:a16="http://schemas.microsoft.com/office/drawing/2014/main" id="{A769AF28-F625-3047-67FB-D221541BBC4E}"/>
               </a:ext>
             </a:extLst>
           </p:cNvPr>
@@ -2373,7 +2373,7 @@
           <a:bodyPr/>
           <a:lstStyle/>
           <a:p>
-            <a:fld id="{952AB204-8260-40C3-AB77-D365BA5872EA}" type="datetimeFigureOut">
+            <a:fld id="{3502B2AD-5CC1-4E7A-A146-BC9782E3E62B}" type="datetimeFigureOut">
               <a:rPr lang="en-US" smtClean="0"/>
               <a:t>6/25/2026</a:t>
             </a:fld>
@@ -2386,7 +2386,7 @@
           <p:cNvPr id="6" name="Footer Placeholder 5">
             <a:extLst>
               <a:ext uri="{FF2B5EF4-FFF2-40B4-BE49-F238E27FC236}">
-                <a16:creationId xmlns:a16="http://schemas.microsoft.com/office/drawing/2014/main" id="{B273332F-45F4-5CEE-0065-F412458011E9}"/>
+                <a16:creationId xmlns:a16="http://schemas.microsoft.com/office/drawing/2014/main" id="{02222984-0ABE-11F5-20FC-4C6660D4108A}"/>
               </a:ext>
             </a:extLst>
           </p:cNvPr>
@@ -2411,7 +2411,7 @@
           <p:cNvPr id="7" name="Slide Number Placeholder 6">
             <a:extLst>
               <a:ext uri="{FF2B5EF4-FFF2-40B4-BE49-F238E27FC236}">
-                <a16:creationId xmlns:a16="http://schemas.microsoft.com/office/drawing/2014/main" id="{C390EF47-E432-D97F-1ED1-6614AC34E0DB}"/>
+                <a16:creationId xmlns:a16="http://schemas.microsoft.com/office/drawing/2014/main" id="{C931D549-AF32-398E-19A4-69E77A5B95F1}"/>
               </a:ext>
             </a:extLst>
           </p:cNvPr>
@@ -2427,7 +2427,7 @@
           <a:bodyPr/>
           <a:lstStyle/>
           <a:p>
-            <a:fld id="{A12C5F40-C9F2-4D97-A957-83DC834DB8C4}" type="slidenum">
+            <a:fld id="{C803AEAB-6DBA-4094-9DB7-716E86827953}" type="slidenum">
               <a:rPr lang="en-US" smtClean="0"/>
               <a:t>‹#›</a:t>
             </a:fld>
@@ -2438,7 +2438,7 @@
     </p:spTree>
     <p:extLst>
       <p:ext uri="{BB962C8B-B14F-4D97-AF65-F5344CB8AC3E}">
-        <p14:creationId xmlns:p14="http://schemas.microsoft.com/office/powerpoint/2010/main" val="3032295649"/>
+        <p14:creationId xmlns:p14="http://schemas.microsoft.com/office/powerpoint/2010/main" val="3709657965"/>
       </p:ext>
     </p:extLst>
   </p:cSld>
@@ -2470,7 +2470,7 @@
           <p:cNvPr id="2" name="Title 1">
             <a:extLst>
               <a:ext uri="{FF2B5EF4-FFF2-40B4-BE49-F238E27FC236}">
-                <a16:creationId xmlns:a16="http://schemas.microsoft.com/office/drawing/2014/main" id="{7E137C61-1D85-6055-6A85-1A070E4BEE37}"/>
+                <a16:creationId xmlns:a16="http://schemas.microsoft.com/office/drawing/2014/main" id="{4A54ABFB-115B-A942-EA71-CDD0E31DCB9F}"/>
               </a:ext>
             </a:extLst>
           </p:cNvPr>
@@ -2507,7 +2507,7 @@
           <p:cNvPr id="3" name="Picture Placeholder 2">
             <a:extLst>
               <a:ext uri="{FF2B5EF4-FFF2-40B4-BE49-F238E27FC236}">
-                <a16:creationId xmlns:a16="http://schemas.microsoft.com/office/drawing/2014/main" id="{D47B5669-B9B6-B86B-C2ED-7B9A70381E71}"/>
+                <a16:creationId xmlns:a16="http://schemas.microsoft.com/office/drawing/2014/main" id="{52EE0104-AE67-981E-DB21-FE51E02E3971}"/>
               </a:ext>
             </a:extLst>
           </p:cNvPr>
@@ -2574,7 +2574,7 @@
           <p:cNvPr id="4" name="Text Placeholder 3">
             <a:extLst>
               <a:ext uri="{FF2B5EF4-FFF2-40B4-BE49-F238E27FC236}">
-                <a16:creationId xmlns:a16="http://schemas.microsoft.com/office/drawing/2014/main" id="{3891BBFF-D8EF-45E5-9577-180797016610}"/>
+                <a16:creationId xmlns:a16="http://schemas.microsoft.com/office/drawing/2014/main" id="{F4DA1379-A98B-6642-56CE-356221B18198}"/>
               </a:ext>
             </a:extLst>
           </p:cNvPr>
@@ -2645,7 +2645,7 @@
           <p:cNvPr id="5" name="Date Placeholder 4">
             <a:extLst>
               <a:ext uri="{FF2B5EF4-FFF2-40B4-BE49-F238E27FC236}">
-                <a16:creationId xmlns:a16="http://schemas.microsoft.com/office/drawing/2014/main" id="{8AC4C60E-15D4-5894-2FE8-5BC97C451435}"/>
+                <a16:creationId xmlns:a16="http://schemas.microsoft.com/office/drawing/2014/main" id="{BD508F93-2262-B276-A523-DCEC8EDA5A28}"/>
               </a:ext>
             </a:extLst>
           </p:cNvPr>
@@ -2661,7 +2661,7 @@
           <a:bodyPr/>
           <a:lstStyle/>
           <a:p>
-            <a:fld id="{952AB204-8260-40C3-AB77-D365BA5872EA}" type="datetimeFigureOut">
+            <a:fld id="{3502B2AD-5CC1-4E7A-A146-BC9782E3E62B}" type="datetimeFigureOut">
               <a:rPr lang="en-US" smtClean="0"/>
               <a:t>6/25/2026</a:t>
             </a:fld>
@@ -2674,7 +2674,7 @@
           <p:cNvPr id="6" name="Footer Placeholder 5">
             <a:extLst>
               <a:ext uri="{FF2B5EF4-FFF2-40B4-BE49-F238E27FC236}">
-                <a16:creationId xmlns:a16="http://schemas.microsoft.com/office/drawing/2014/main" id="{1AF633C6-EF1C-98DD-7C6E-A0ABAC148683}"/>
+                <a16:creationId xmlns:a16="http://schemas.microsoft.com/office/drawing/2014/main" id="{137D174B-9364-6277-3B8C-C91BB1AFC609}"/>
               </a:ext>
             </a:extLst>
           </p:cNvPr>
@@ -2699,7 +2699,7 @@
           <p:cNvPr id="7" name="Slide Number Placeholder 6">
             <a:extLst>
               <a:ext uri="{FF2B5EF4-FFF2-40B4-BE49-F238E27FC236}">
-                <a16:creationId xmlns:a16="http://schemas.microsoft.com/office/drawing/2014/main" id="{B820E07D-F7E8-D143-AD53-5018460BCC72}"/>
+                <a16:creationId xmlns:a16="http://schemas.microsoft.com/office/drawing/2014/main" id="{BAC87DF9-8C62-17FD-E68D-1B203CB358AB}"/>
               </a:ext>
             </a:extLst>
           </p:cNvPr>
@@ -2715,7 +2715,7 @@
           <a:bodyPr/>
           <a:lstStyle/>
           <a:p>
-            <a:fld id="{A12C5F40-C9F2-4D97-A957-83DC834DB8C4}" type="slidenum">
+            <a:fld id="{C803AEAB-6DBA-4094-9DB7-716E86827953}" type="slidenum">
               <a:rPr lang="en-US" smtClean="0"/>
               <a:t>‹#›</a:t>
             </a:fld>
@@ -2726,7 +2726,7 @@
     </p:spTree>
     <p:extLst>
       <p:ext uri="{BB962C8B-B14F-4D97-AF65-F5344CB8AC3E}">
-        <p14:creationId xmlns:p14="http://schemas.microsoft.com/office/powerpoint/2010/main" val="2157436988"/>
+        <p14:creationId xmlns:p14="http://schemas.microsoft.com/office/powerpoint/2010/main" val="1436525498"/>
       </p:ext>
     </p:extLst>
   </p:cSld>
@@ -2763,7 +2763,7 @@
           <p:cNvPr id="2" name="Title Placeholder 1">
             <a:extLst>
               <a:ext uri="{FF2B5EF4-FFF2-40B4-BE49-F238E27FC236}">
-                <a16:creationId xmlns:a16="http://schemas.microsoft.com/office/drawing/2014/main" id="{DBABCCDD-2286-FD10-D4A1-B856482ECBF2}"/>
+                <a16:creationId xmlns:a16="http://schemas.microsoft.com/office/drawing/2014/main" id="{83091529-7832-C22A-9AE3-2ABCA21087AE}"/>
               </a:ext>
             </a:extLst>
           </p:cNvPr>
@@ -2801,7 +2801,7 @@
           <p:cNvPr id="3" name="Text Placeholder 2">
             <a:extLst>
               <a:ext uri="{FF2B5EF4-FFF2-40B4-BE49-F238E27FC236}">
-                <a16:creationId xmlns:a16="http://schemas.microsoft.com/office/drawing/2014/main" id="{CE1817FB-7868-B193-655A-27317A645011}"/>
+                <a16:creationId xmlns:a16="http://schemas.microsoft.com/office/drawing/2014/main" id="{548F4FFC-DE73-CF7A-160B-777BF6988889}"/>
               </a:ext>
             </a:extLst>
           </p:cNvPr>
@@ -2868,7 +2868,7 @@
           <p:cNvPr id="4" name="Date Placeholder 3">
             <a:extLst>
               <a:ext uri="{FF2B5EF4-FFF2-40B4-BE49-F238E27FC236}">
-                <a16:creationId xmlns:a16="http://schemas.microsoft.com/office/drawing/2014/main" id="{17D30087-3AC1-C79F-A5A6-34DA3283B06E}"/>
+                <a16:creationId xmlns:a16="http://schemas.microsoft.com/office/drawing/2014/main" id="{F55277EE-D041-BFAD-854A-B2782023AEA4}"/>
               </a:ext>
             </a:extLst>
           </p:cNvPr>
@@ -2902,7 +2902,7 @@
             </a:lvl1pPr>
           </a:lstStyle>
           <a:p>
-            <a:fld id="{952AB204-8260-40C3-AB77-D365BA5872EA}" type="datetimeFigureOut">
+            <a:fld id="{3502B2AD-5CC1-4E7A-A146-BC9782E3E62B}" type="datetimeFigureOut">
               <a:rPr lang="en-US" smtClean="0"/>
               <a:t>6/25/2026</a:t>
             </a:fld>
@@ -2915,7 +2915,7 @@
           <p:cNvPr id="5" name="Footer Placeholder 4">
             <a:extLst>
               <a:ext uri="{FF2B5EF4-FFF2-40B4-BE49-F238E27FC236}">
-                <a16:creationId xmlns:a16="http://schemas.microsoft.com/office/drawing/2014/main" id="{02DEA638-D2BF-7E7F-410A-6E7100C1A173}"/>
+                <a16:creationId xmlns:a16="http://schemas.microsoft.com/office/drawing/2014/main" id="{CF2E3FA5-8F66-1200-12DB-97DE3A8A3B67}"/>
               </a:ext>
             </a:extLst>
           </p:cNvPr>
@@ -2958,7 +2958,7 @@
           <p:cNvPr id="6" name="Slide Number Placeholder 5">
             <a:extLst>
               <a:ext uri="{FF2B5EF4-FFF2-40B4-BE49-F238E27FC236}">
-                <a16:creationId xmlns:a16="http://schemas.microsoft.com/office/drawing/2014/main" id="{14A4B1CD-F36B-1A50-8330-D9655EF4BA9A}"/>
+                <a16:creationId xmlns:a16="http://schemas.microsoft.com/office/drawing/2014/main" id="{2092AF58-3384-8B58-E6EF-4541B6735BC7}"/>
               </a:ext>
             </a:extLst>
           </p:cNvPr>
@@ -2992,7 +2992,7 @@
             </a:lvl1pPr>
           </a:lstStyle>
           <a:p>
-            <a:fld id="{A12C5F40-C9F2-4D97-A957-83DC834DB8C4}" type="slidenum">
+            <a:fld id="{C803AEAB-6DBA-4094-9DB7-716E86827953}" type="slidenum">
               <a:rPr lang="en-US" smtClean="0"/>
               <a:t>‹#›</a:t>
             </a:fld>
@@ -3003,7 +3003,7 @@
     </p:spTree>
     <p:extLst>
       <p:ext uri="{BB962C8B-B14F-4D97-AF65-F5344CB8AC3E}">
-        <p14:creationId xmlns:p14="http://schemas.microsoft.com/office/powerpoint/2010/main" val="1000166125"/>
+        <p14:creationId xmlns:p14="http://schemas.microsoft.com/office/powerpoint/2010/main" val="2625530733"/>
       </p:ext>
     </p:extLst>
   </p:cSld>
@@ -3326,7 +3326,7 @@
           <p:cNvPr id="2" name="Rectangle">
             <a:extLst>
               <a:ext uri="{FF2B5EF4-FFF2-40B4-BE49-F238E27FC236}">
-                <a16:creationId xmlns:a16="http://schemas.microsoft.com/office/drawing/2014/main" id="{AF9DE3C8-8AA0-E6F2-1DD8-ED678FDBC292}"/>
+                <a16:creationId xmlns:a16="http://schemas.microsoft.com/office/drawing/2014/main" id="{5F1360F0-58A4-A2EE-EEC3-300A2BB982CC}"/>
               </a:ext>
             </a:extLst>
           </p:cNvPr>
@@ -3387,7 +3387,7 @@
           <p:cNvPr id="3" name="RoundedRect">
             <a:extLst>
               <a:ext uri="{FF2B5EF4-FFF2-40B4-BE49-F238E27FC236}">
-                <a16:creationId xmlns:a16="http://schemas.microsoft.com/office/drawing/2014/main" id="{C31A9AF4-4930-7B72-4C33-633445318542}"/>
+                <a16:creationId xmlns:a16="http://schemas.microsoft.com/office/drawing/2014/main" id="{3DE75BC3-19B5-0413-2CBC-070F9F25F7F9}"/>
               </a:ext>
             </a:extLst>
           </p:cNvPr>
@@ -3448,7 +3448,7 @@
           <p:cNvPr id="4" name="Ellipse">
             <a:extLst>
               <a:ext uri="{FF2B5EF4-FFF2-40B4-BE49-F238E27FC236}">
-                <a16:creationId xmlns:a16="http://schemas.microsoft.com/office/drawing/2014/main" id="{7EBF5E8C-0D7B-585C-0C1B-61C26EF60985}"/>
+                <a16:creationId xmlns:a16="http://schemas.microsoft.com/office/drawing/2014/main" id="{EE0B69DF-C4A4-C6F7-BEFE-686AB4ECC5B7}"/>
               </a:ext>
             </a:extLst>
           </p:cNvPr>
@@ -3509,7 +3509,7 @@
           <p:cNvPr id="5" name="Chevron">
             <a:extLst>
               <a:ext uri="{FF2B5EF4-FFF2-40B4-BE49-F238E27FC236}">
-                <a16:creationId xmlns:a16="http://schemas.microsoft.com/office/drawing/2014/main" id="{0F080708-13F1-FBB1-4B89-83569527DDC0}"/>
+                <a16:creationId xmlns:a16="http://schemas.microsoft.com/office/drawing/2014/main" id="{F1517A8D-A975-7C1B-7619-0D2021C1953C}"/>
               </a:ext>
             </a:extLst>
           </p:cNvPr>
@@ -3568,7 +3568,7 @@
     </p:spTree>
     <p:extLst>
       <p:ext uri="{BB962C8B-B14F-4D97-AF65-F5344CB8AC3E}">
-        <p14:creationId xmlns:p14="http://schemas.microsoft.com/office/powerpoint/2010/main" val="2155703543"/>
+        <p14:creationId xmlns:p14="http://schemas.microsoft.com/office/powerpoint/2010/main" val="3221786323"/>
       </p:ext>
     </p:extLst>
   </p:cSld>

--- a/tools/FreeP.RenderCompare/corpus/02-autoshapes.pptx
+++ b/tools/FreeP.RenderCompare/corpus/02-autoshapes.pptx
@@ -129,7 +129,7 @@
           <p:cNvPr id="2" name="Title 1">
             <a:extLst>
               <a:ext uri="{FF2B5EF4-FFF2-40B4-BE49-F238E27FC236}">
-                <a16:creationId xmlns:a16="http://schemas.microsoft.com/office/drawing/2014/main" id="{956FC4EF-4EC2-892F-64FF-ED6D2DCDB61E}"/>
+                <a16:creationId xmlns:a16="http://schemas.microsoft.com/office/drawing/2014/main" id="{D46D49D4-8CE2-24B5-01FD-C1677306E708}"/>
               </a:ext>
             </a:extLst>
           </p:cNvPr>
@@ -166,7 +166,7 @@
           <p:cNvPr id="3" name="Subtitle 2">
             <a:extLst>
               <a:ext uri="{FF2B5EF4-FFF2-40B4-BE49-F238E27FC236}">
-                <a16:creationId xmlns:a16="http://schemas.microsoft.com/office/drawing/2014/main" id="{9C9B4CA5-B443-441B-2A95-407B987A998E}"/>
+                <a16:creationId xmlns:a16="http://schemas.microsoft.com/office/drawing/2014/main" id="{4324BA82-D8F6-2526-232F-D99740689283}"/>
               </a:ext>
             </a:extLst>
           </p:cNvPr>
@@ -236,7 +236,7 @@
           <p:cNvPr id="4" name="Date Placeholder 3">
             <a:extLst>
               <a:ext uri="{FF2B5EF4-FFF2-40B4-BE49-F238E27FC236}">
-                <a16:creationId xmlns:a16="http://schemas.microsoft.com/office/drawing/2014/main" id="{0239DFD3-4581-DF8F-90CB-52F2360EE68C}"/>
+                <a16:creationId xmlns:a16="http://schemas.microsoft.com/office/drawing/2014/main" id="{365D9985-FE9C-B61E-3A9A-20322C6852EF}"/>
               </a:ext>
             </a:extLst>
           </p:cNvPr>
@@ -252,7 +252,7 @@
           <a:bodyPr/>
           <a:lstStyle/>
           <a:p>
-            <a:fld id="{3502B2AD-5CC1-4E7A-A146-BC9782E3E62B}" type="datetimeFigureOut">
+            <a:fld id="{4B285AA2-A1C5-41B4-8ADF-267E3E4B1679}" type="datetimeFigureOut">
               <a:rPr lang="en-US" smtClean="0"/>
               <a:t>6/25/2026</a:t>
             </a:fld>
@@ -265,7 +265,7 @@
           <p:cNvPr id="5" name="Footer Placeholder 4">
             <a:extLst>
               <a:ext uri="{FF2B5EF4-FFF2-40B4-BE49-F238E27FC236}">
-                <a16:creationId xmlns:a16="http://schemas.microsoft.com/office/drawing/2014/main" id="{B7FE8893-DC20-BFA8-F133-84537C425949}"/>
+                <a16:creationId xmlns:a16="http://schemas.microsoft.com/office/drawing/2014/main" id="{19939D74-74FC-5B34-6A7D-6A31E075537D}"/>
               </a:ext>
             </a:extLst>
           </p:cNvPr>
@@ -290,7 +290,7 @@
           <p:cNvPr id="6" name="Slide Number Placeholder 5">
             <a:extLst>
               <a:ext uri="{FF2B5EF4-FFF2-40B4-BE49-F238E27FC236}">
-                <a16:creationId xmlns:a16="http://schemas.microsoft.com/office/drawing/2014/main" id="{F3407B92-4268-1634-9F9D-8C13E54E25E2}"/>
+                <a16:creationId xmlns:a16="http://schemas.microsoft.com/office/drawing/2014/main" id="{F4CE6B8B-103F-5158-294F-133D1A171327}"/>
               </a:ext>
             </a:extLst>
           </p:cNvPr>
@@ -306,7 +306,7 @@
           <a:bodyPr/>
           <a:lstStyle/>
           <a:p>
-            <a:fld id="{C803AEAB-6DBA-4094-9DB7-716E86827953}" type="slidenum">
+            <a:fld id="{89220CC8-2F38-4218-9C39-EDF876764042}" type="slidenum">
               <a:rPr lang="en-US" smtClean="0"/>
               <a:t>‹#›</a:t>
             </a:fld>
@@ -317,7 +317,7 @@
     </p:spTree>
     <p:extLst>
       <p:ext uri="{BB962C8B-B14F-4D97-AF65-F5344CB8AC3E}">
-        <p14:creationId xmlns:p14="http://schemas.microsoft.com/office/powerpoint/2010/main" val="3363610097"/>
+        <p14:creationId xmlns:p14="http://schemas.microsoft.com/office/powerpoint/2010/main" val="3089146396"/>
       </p:ext>
     </p:extLst>
   </p:cSld>
@@ -349,7 +349,7 @@
           <p:cNvPr id="2" name="Title 1">
             <a:extLst>
               <a:ext uri="{FF2B5EF4-FFF2-40B4-BE49-F238E27FC236}">
-                <a16:creationId xmlns:a16="http://schemas.microsoft.com/office/drawing/2014/main" id="{2BF2408F-7538-64AD-8E51-B089243FEA1C}"/>
+                <a16:creationId xmlns:a16="http://schemas.microsoft.com/office/drawing/2014/main" id="{B8FF741A-F36C-3FD8-B4FB-0A1BF990B1F5}"/>
               </a:ext>
             </a:extLst>
           </p:cNvPr>
@@ -377,7 +377,7 @@
           <p:cNvPr id="3" name="Vertical Text Placeholder 2">
             <a:extLst>
               <a:ext uri="{FF2B5EF4-FFF2-40B4-BE49-F238E27FC236}">
-                <a16:creationId xmlns:a16="http://schemas.microsoft.com/office/drawing/2014/main" id="{96C4D385-FCB6-D1C5-1FF2-5666587636AD}"/>
+                <a16:creationId xmlns:a16="http://schemas.microsoft.com/office/drawing/2014/main" id="{FE639EB9-2A5A-15A5-A07E-7E200F014BCD}"/>
               </a:ext>
             </a:extLst>
           </p:cNvPr>
@@ -434,7 +434,7 @@
           <p:cNvPr id="4" name="Date Placeholder 3">
             <a:extLst>
               <a:ext uri="{FF2B5EF4-FFF2-40B4-BE49-F238E27FC236}">
-                <a16:creationId xmlns:a16="http://schemas.microsoft.com/office/drawing/2014/main" id="{278330F1-3AC9-2785-9EE0-19DA799105FF}"/>
+                <a16:creationId xmlns:a16="http://schemas.microsoft.com/office/drawing/2014/main" id="{2AB02C54-6BCA-1CDD-538A-6B52537974D0}"/>
               </a:ext>
             </a:extLst>
           </p:cNvPr>
@@ -450,7 +450,7 @@
           <a:bodyPr/>
           <a:lstStyle/>
           <a:p>
-            <a:fld id="{3502B2AD-5CC1-4E7A-A146-BC9782E3E62B}" type="datetimeFigureOut">
+            <a:fld id="{4B285AA2-A1C5-41B4-8ADF-267E3E4B1679}" type="datetimeFigureOut">
               <a:rPr lang="en-US" smtClean="0"/>
               <a:t>6/25/2026</a:t>
             </a:fld>
@@ -463,7 +463,7 @@
           <p:cNvPr id="5" name="Footer Placeholder 4">
             <a:extLst>
               <a:ext uri="{FF2B5EF4-FFF2-40B4-BE49-F238E27FC236}">
-                <a16:creationId xmlns:a16="http://schemas.microsoft.com/office/drawing/2014/main" id="{6A623302-EA8E-73D8-8109-D4FEB8DE7082}"/>
+                <a16:creationId xmlns:a16="http://schemas.microsoft.com/office/drawing/2014/main" id="{D8090C14-0496-284E-5A58-E4CE19639EB4}"/>
               </a:ext>
             </a:extLst>
           </p:cNvPr>
@@ -488,7 +488,7 @@
           <p:cNvPr id="6" name="Slide Number Placeholder 5">
             <a:extLst>
               <a:ext uri="{FF2B5EF4-FFF2-40B4-BE49-F238E27FC236}">
-                <a16:creationId xmlns:a16="http://schemas.microsoft.com/office/drawing/2014/main" id="{BCD74D07-3C31-9081-69D3-6C8E346C6CAD}"/>
+                <a16:creationId xmlns:a16="http://schemas.microsoft.com/office/drawing/2014/main" id="{F56C7EC9-57EF-FDC7-6C1C-E4AE8CA830D6}"/>
               </a:ext>
             </a:extLst>
           </p:cNvPr>
@@ -504,7 +504,7 @@
           <a:bodyPr/>
           <a:lstStyle/>
           <a:p>
-            <a:fld id="{C803AEAB-6DBA-4094-9DB7-716E86827953}" type="slidenum">
+            <a:fld id="{89220CC8-2F38-4218-9C39-EDF876764042}" type="slidenum">
               <a:rPr lang="en-US" smtClean="0"/>
               <a:t>‹#›</a:t>
             </a:fld>
@@ -515,7 +515,7 @@
     </p:spTree>
     <p:extLst>
       <p:ext uri="{BB962C8B-B14F-4D97-AF65-F5344CB8AC3E}">
-        <p14:creationId xmlns:p14="http://schemas.microsoft.com/office/powerpoint/2010/main" val="1223143425"/>
+        <p14:creationId xmlns:p14="http://schemas.microsoft.com/office/powerpoint/2010/main" val="3849391624"/>
       </p:ext>
     </p:extLst>
   </p:cSld>
@@ -547,7 +547,7 @@
           <p:cNvPr id="2" name="Vertical Title 1">
             <a:extLst>
               <a:ext uri="{FF2B5EF4-FFF2-40B4-BE49-F238E27FC236}">
-                <a16:creationId xmlns:a16="http://schemas.microsoft.com/office/drawing/2014/main" id="{EBC31459-194A-9EAB-30B0-4C2FA8CFF306}"/>
+                <a16:creationId xmlns:a16="http://schemas.microsoft.com/office/drawing/2014/main" id="{0C1FACCA-B748-4BDD-D74E-1794070CC2CC}"/>
               </a:ext>
             </a:extLst>
           </p:cNvPr>
@@ -580,7 +580,7 @@
           <p:cNvPr id="3" name="Vertical Text Placeholder 2">
             <a:extLst>
               <a:ext uri="{FF2B5EF4-FFF2-40B4-BE49-F238E27FC236}">
-                <a16:creationId xmlns:a16="http://schemas.microsoft.com/office/drawing/2014/main" id="{69792118-466F-83BF-430F-C6184D1A8372}"/>
+                <a16:creationId xmlns:a16="http://schemas.microsoft.com/office/drawing/2014/main" id="{EBA9458A-4BF0-284B-4139-A87D4FC33B9F}"/>
               </a:ext>
             </a:extLst>
           </p:cNvPr>
@@ -642,7 +642,7 @@
           <p:cNvPr id="4" name="Date Placeholder 3">
             <a:extLst>
               <a:ext uri="{FF2B5EF4-FFF2-40B4-BE49-F238E27FC236}">
-                <a16:creationId xmlns:a16="http://schemas.microsoft.com/office/drawing/2014/main" id="{C5A31CFF-35F1-B6E9-684B-0539715E8DBC}"/>
+                <a16:creationId xmlns:a16="http://schemas.microsoft.com/office/drawing/2014/main" id="{4074E148-183C-F11A-5033-5503C453C2E5}"/>
               </a:ext>
             </a:extLst>
           </p:cNvPr>
@@ -658,7 +658,7 @@
           <a:bodyPr/>
           <a:lstStyle/>
           <a:p>
-            <a:fld id="{3502B2AD-5CC1-4E7A-A146-BC9782E3E62B}" type="datetimeFigureOut">
+            <a:fld id="{4B285AA2-A1C5-41B4-8ADF-267E3E4B1679}" type="datetimeFigureOut">
               <a:rPr lang="en-US" smtClean="0"/>
               <a:t>6/25/2026</a:t>
             </a:fld>
@@ -671,7 +671,7 @@
           <p:cNvPr id="5" name="Footer Placeholder 4">
             <a:extLst>
               <a:ext uri="{FF2B5EF4-FFF2-40B4-BE49-F238E27FC236}">
-                <a16:creationId xmlns:a16="http://schemas.microsoft.com/office/drawing/2014/main" id="{A4641D74-7F32-D7AD-3B30-3CCBFB66565E}"/>
+                <a16:creationId xmlns:a16="http://schemas.microsoft.com/office/drawing/2014/main" id="{BCADD32F-A638-A9AC-CE93-E2DB759157D2}"/>
               </a:ext>
             </a:extLst>
           </p:cNvPr>
@@ -696,7 +696,7 @@
           <p:cNvPr id="6" name="Slide Number Placeholder 5">
             <a:extLst>
               <a:ext uri="{FF2B5EF4-FFF2-40B4-BE49-F238E27FC236}">
-                <a16:creationId xmlns:a16="http://schemas.microsoft.com/office/drawing/2014/main" id="{DA829B7D-3794-C58E-1A06-E11A69D4D8DC}"/>
+                <a16:creationId xmlns:a16="http://schemas.microsoft.com/office/drawing/2014/main" id="{8723299B-C849-1CB4-2897-497C2FCD07FC}"/>
               </a:ext>
             </a:extLst>
           </p:cNvPr>
@@ -712,7 +712,7 @@
           <a:bodyPr/>
           <a:lstStyle/>
           <a:p>
-            <a:fld id="{C803AEAB-6DBA-4094-9DB7-716E86827953}" type="slidenum">
+            <a:fld id="{89220CC8-2F38-4218-9C39-EDF876764042}" type="slidenum">
               <a:rPr lang="en-US" smtClean="0"/>
               <a:t>‹#›</a:t>
             </a:fld>
@@ -723,7 +723,7 @@
     </p:spTree>
     <p:extLst>
       <p:ext uri="{BB962C8B-B14F-4D97-AF65-F5344CB8AC3E}">
-        <p14:creationId xmlns:p14="http://schemas.microsoft.com/office/powerpoint/2010/main" val="3420413778"/>
+        <p14:creationId xmlns:p14="http://schemas.microsoft.com/office/powerpoint/2010/main" val="3210234572"/>
       </p:ext>
     </p:extLst>
   </p:cSld>
@@ -755,7 +755,7 @@
           <p:cNvPr id="2" name="Title 1">
             <a:extLst>
               <a:ext uri="{FF2B5EF4-FFF2-40B4-BE49-F238E27FC236}">
-                <a16:creationId xmlns:a16="http://schemas.microsoft.com/office/drawing/2014/main" id="{9F315EFC-3C1D-256B-0EDA-76018AB2497B}"/>
+                <a16:creationId xmlns:a16="http://schemas.microsoft.com/office/drawing/2014/main" id="{783A99FD-FC6E-0F9B-D636-622F256E2070}"/>
               </a:ext>
             </a:extLst>
           </p:cNvPr>
@@ -783,7 +783,7 @@
           <p:cNvPr id="3" name="Content Placeholder 2">
             <a:extLst>
               <a:ext uri="{FF2B5EF4-FFF2-40B4-BE49-F238E27FC236}">
-                <a16:creationId xmlns:a16="http://schemas.microsoft.com/office/drawing/2014/main" id="{7E306F31-A33D-D469-2C54-0736A217EC4C}"/>
+                <a16:creationId xmlns:a16="http://schemas.microsoft.com/office/drawing/2014/main" id="{8DB39C2D-2132-C063-747F-56F30C310B75}"/>
               </a:ext>
             </a:extLst>
           </p:cNvPr>
@@ -840,7 +840,7 @@
           <p:cNvPr id="4" name="Date Placeholder 3">
             <a:extLst>
               <a:ext uri="{FF2B5EF4-FFF2-40B4-BE49-F238E27FC236}">
-                <a16:creationId xmlns:a16="http://schemas.microsoft.com/office/drawing/2014/main" id="{2575DA0D-F749-7782-FAF3-1AEF5609FF88}"/>
+                <a16:creationId xmlns:a16="http://schemas.microsoft.com/office/drawing/2014/main" id="{56B7DEA9-4920-DEE8-1137-1CCBF1263BE0}"/>
               </a:ext>
             </a:extLst>
           </p:cNvPr>
@@ -856,7 +856,7 @@
           <a:bodyPr/>
           <a:lstStyle/>
           <a:p>
-            <a:fld id="{3502B2AD-5CC1-4E7A-A146-BC9782E3E62B}" type="datetimeFigureOut">
+            <a:fld id="{4B285AA2-A1C5-41B4-8ADF-267E3E4B1679}" type="datetimeFigureOut">
               <a:rPr lang="en-US" smtClean="0"/>
               <a:t>6/25/2026</a:t>
             </a:fld>
@@ -869,7 +869,7 @@
           <p:cNvPr id="5" name="Footer Placeholder 4">
             <a:extLst>
               <a:ext uri="{FF2B5EF4-FFF2-40B4-BE49-F238E27FC236}">
-                <a16:creationId xmlns:a16="http://schemas.microsoft.com/office/drawing/2014/main" id="{08567E97-38D7-8B2B-E613-027794A2698F}"/>
+                <a16:creationId xmlns:a16="http://schemas.microsoft.com/office/drawing/2014/main" id="{670997B9-E5C1-FB38-4A77-65CF0A526758}"/>
               </a:ext>
             </a:extLst>
           </p:cNvPr>
@@ -894,7 +894,7 @@
           <p:cNvPr id="6" name="Slide Number Placeholder 5">
             <a:extLst>
               <a:ext uri="{FF2B5EF4-FFF2-40B4-BE49-F238E27FC236}">
-                <a16:creationId xmlns:a16="http://schemas.microsoft.com/office/drawing/2014/main" id="{035AD76A-5569-7AAC-5018-54D000124794}"/>
+                <a16:creationId xmlns:a16="http://schemas.microsoft.com/office/drawing/2014/main" id="{8FC53BFE-62AD-6C99-BE6C-2CA190CEE2E1}"/>
               </a:ext>
             </a:extLst>
           </p:cNvPr>
@@ -910,7 +910,7 @@
           <a:bodyPr/>
           <a:lstStyle/>
           <a:p>
-            <a:fld id="{C803AEAB-6DBA-4094-9DB7-716E86827953}" type="slidenum">
+            <a:fld id="{89220CC8-2F38-4218-9C39-EDF876764042}" type="slidenum">
               <a:rPr lang="en-US" smtClean="0"/>
               <a:t>‹#›</a:t>
             </a:fld>
@@ -921,7 +921,7 @@
     </p:spTree>
     <p:extLst>
       <p:ext uri="{BB962C8B-B14F-4D97-AF65-F5344CB8AC3E}">
-        <p14:creationId xmlns:p14="http://schemas.microsoft.com/office/powerpoint/2010/main" val="233806399"/>
+        <p14:creationId xmlns:p14="http://schemas.microsoft.com/office/powerpoint/2010/main" val="2112510840"/>
       </p:ext>
     </p:extLst>
   </p:cSld>
@@ -953,7 +953,7 @@
           <p:cNvPr id="2" name="Title 1">
             <a:extLst>
               <a:ext uri="{FF2B5EF4-FFF2-40B4-BE49-F238E27FC236}">
-                <a16:creationId xmlns:a16="http://schemas.microsoft.com/office/drawing/2014/main" id="{8AC04DD1-C83A-EAD0-1416-F3DF404A6300}"/>
+                <a16:creationId xmlns:a16="http://schemas.microsoft.com/office/drawing/2014/main" id="{D0E09A18-5E68-6DB0-612B-E7F0CC00D3BF}"/>
               </a:ext>
             </a:extLst>
           </p:cNvPr>
@@ -990,7 +990,7 @@
           <p:cNvPr id="3" name="Text Placeholder 2">
             <a:extLst>
               <a:ext uri="{FF2B5EF4-FFF2-40B4-BE49-F238E27FC236}">
-                <a16:creationId xmlns:a16="http://schemas.microsoft.com/office/drawing/2014/main" id="{1F9EC3D3-30B5-C7C9-6C12-6BBCD33E8B76}"/>
+                <a16:creationId xmlns:a16="http://schemas.microsoft.com/office/drawing/2014/main" id="{0EB5742B-031D-005F-D980-47A24D6D804B}"/>
               </a:ext>
             </a:extLst>
           </p:cNvPr>
@@ -1115,7 +1115,7 @@
           <p:cNvPr id="4" name="Date Placeholder 3">
             <a:extLst>
               <a:ext uri="{FF2B5EF4-FFF2-40B4-BE49-F238E27FC236}">
-                <a16:creationId xmlns:a16="http://schemas.microsoft.com/office/drawing/2014/main" id="{8A5F1980-DC4D-51F2-1016-C960C2FA5F64}"/>
+                <a16:creationId xmlns:a16="http://schemas.microsoft.com/office/drawing/2014/main" id="{5E848A55-40D6-8AEB-B669-4A3B46CF6920}"/>
               </a:ext>
             </a:extLst>
           </p:cNvPr>
@@ -1131,7 +1131,7 @@
           <a:bodyPr/>
           <a:lstStyle/>
           <a:p>
-            <a:fld id="{3502B2AD-5CC1-4E7A-A146-BC9782E3E62B}" type="datetimeFigureOut">
+            <a:fld id="{4B285AA2-A1C5-41B4-8ADF-267E3E4B1679}" type="datetimeFigureOut">
               <a:rPr lang="en-US" smtClean="0"/>
               <a:t>6/25/2026</a:t>
             </a:fld>
@@ -1144,7 +1144,7 @@
           <p:cNvPr id="5" name="Footer Placeholder 4">
             <a:extLst>
               <a:ext uri="{FF2B5EF4-FFF2-40B4-BE49-F238E27FC236}">
-                <a16:creationId xmlns:a16="http://schemas.microsoft.com/office/drawing/2014/main" id="{D4F641C4-CB4A-593B-6F72-C9E985A1ECF2}"/>
+                <a16:creationId xmlns:a16="http://schemas.microsoft.com/office/drawing/2014/main" id="{1F8F8547-2D07-93D7-2605-7FB314E3B78A}"/>
               </a:ext>
             </a:extLst>
           </p:cNvPr>
@@ -1169,7 +1169,7 @@
           <p:cNvPr id="6" name="Slide Number Placeholder 5">
             <a:extLst>
               <a:ext uri="{FF2B5EF4-FFF2-40B4-BE49-F238E27FC236}">
-                <a16:creationId xmlns:a16="http://schemas.microsoft.com/office/drawing/2014/main" id="{5FBDCD16-610D-484A-41ED-03910B48E41C}"/>
+                <a16:creationId xmlns:a16="http://schemas.microsoft.com/office/drawing/2014/main" id="{DD9BB36E-42B3-B205-1886-B4695C46DA11}"/>
               </a:ext>
             </a:extLst>
           </p:cNvPr>
@@ -1185,7 +1185,7 @@
           <a:bodyPr/>
           <a:lstStyle/>
           <a:p>
-            <a:fld id="{C803AEAB-6DBA-4094-9DB7-716E86827953}" type="slidenum">
+            <a:fld id="{89220CC8-2F38-4218-9C39-EDF876764042}" type="slidenum">
               <a:rPr lang="en-US" smtClean="0"/>
               <a:t>‹#›</a:t>
             </a:fld>
@@ -1196,7 +1196,7 @@
     </p:spTree>
     <p:extLst>
       <p:ext uri="{BB962C8B-B14F-4D97-AF65-F5344CB8AC3E}">
-        <p14:creationId xmlns:p14="http://schemas.microsoft.com/office/powerpoint/2010/main" val="449111464"/>
+        <p14:creationId xmlns:p14="http://schemas.microsoft.com/office/powerpoint/2010/main" val="111207784"/>
       </p:ext>
     </p:extLst>
   </p:cSld>
@@ -1228,7 +1228,7 @@
           <p:cNvPr id="2" name="Title 1">
             <a:extLst>
               <a:ext uri="{FF2B5EF4-FFF2-40B4-BE49-F238E27FC236}">
-                <a16:creationId xmlns:a16="http://schemas.microsoft.com/office/drawing/2014/main" id="{67940B17-B810-B0FB-C23E-43778CD46D74}"/>
+                <a16:creationId xmlns:a16="http://schemas.microsoft.com/office/drawing/2014/main" id="{5597C078-E9AB-A2FA-3F89-9D9E561BA8A3}"/>
               </a:ext>
             </a:extLst>
           </p:cNvPr>
@@ -1256,7 +1256,7 @@
           <p:cNvPr id="3" name="Content Placeholder 2">
             <a:extLst>
               <a:ext uri="{FF2B5EF4-FFF2-40B4-BE49-F238E27FC236}">
-                <a16:creationId xmlns:a16="http://schemas.microsoft.com/office/drawing/2014/main" id="{E9C783FC-A5DC-310B-022B-9DA0C78A65F6}"/>
+                <a16:creationId xmlns:a16="http://schemas.microsoft.com/office/drawing/2014/main" id="{57075D5D-94B1-E244-45CC-1B9A4DC8B375}"/>
               </a:ext>
             </a:extLst>
           </p:cNvPr>
@@ -1318,7 +1318,7 @@
           <p:cNvPr id="4" name="Content Placeholder 3">
             <a:extLst>
               <a:ext uri="{FF2B5EF4-FFF2-40B4-BE49-F238E27FC236}">
-                <a16:creationId xmlns:a16="http://schemas.microsoft.com/office/drawing/2014/main" id="{E8B02696-E950-4B84-F116-BF2C42710163}"/>
+                <a16:creationId xmlns:a16="http://schemas.microsoft.com/office/drawing/2014/main" id="{4C420CE8-EC7B-F18F-C7F2-6F00FFDD5D1D}"/>
               </a:ext>
             </a:extLst>
           </p:cNvPr>
@@ -1380,7 +1380,7 @@
           <p:cNvPr id="5" name="Date Placeholder 4">
             <a:extLst>
               <a:ext uri="{FF2B5EF4-FFF2-40B4-BE49-F238E27FC236}">
-                <a16:creationId xmlns:a16="http://schemas.microsoft.com/office/drawing/2014/main" id="{0A730174-B3A2-7824-B54C-81397526FED5}"/>
+                <a16:creationId xmlns:a16="http://schemas.microsoft.com/office/drawing/2014/main" id="{40C81661-171B-A279-3682-C6544CF2E702}"/>
               </a:ext>
             </a:extLst>
           </p:cNvPr>
@@ -1396,7 +1396,7 @@
           <a:bodyPr/>
           <a:lstStyle/>
           <a:p>
-            <a:fld id="{3502B2AD-5CC1-4E7A-A146-BC9782E3E62B}" type="datetimeFigureOut">
+            <a:fld id="{4B285AA2-A1C5-41B4-8ADF-267E3E4B1679}" type="datetimeFigureOut">
               <a:rPr lang="en-US" smtClean="0"/>
               <a:t>6/25/2026</a:t>
             </a:fld>
@@ -1409,7 +1409,7 @@
           <p:cNvPr id="6" name="Footer Placeholder 5">
             <a:extLst>
               <a:ext uri="{FF2B5EF4-FFF2-40B4-BE49-F238E27FC236}">
-                <a16:creationId xmlns:a16="http://schemas.microsoft.com/office/drawing/2014/main" id="{50EDAB92-5D08-A583-70B5-5F1D6918CB61}"/>
+                <a16:creationId xmlns:a16="http://schemas.microsoft.com/office/drawing/2014/main" id="{181425C3-5303-8296-6A8D-6CB3E8792CFC}"/>
               </a:ext>
             </a:extLst>
           </p:cNvPr>
@@ -1434,7 +1434,7 @@
           <p:cNvPr id="7" name="Slide Number Placeholder 6">
             <a:extLst>
               <a:ext uri="{FF2B5EF4-FFF2-40B4-BE49-F238E27FC236}">
-                <a16:creationId xmlns:a16="http://schemas.microsoft.com/office/drawing/2014/main" id="{E394486D-1D68-58BC-A5BC-7ABA004631D8}"/>
+                <a16:creationId xmlns:a16="http://schemas.microsoft.com/office/drawing/2014/main" id="{C20A5B86-F089-D1F4-04FB-285FC706F756}"/>
               </a:ext>
             </a:extLst>
           </p:cNvPr>
@@ -1450,7 +1450,7 @@
           <a:bodyPr/>
           <a:lstStyle/>
           <a:p>
-            <a:fld id="{C803AEAB-6DBA-4094-9DB7-716E86827953}" type="slidenum">
+            <a:fld id="{89220CC8-2F38-4218-9C39-EDF876764042}" type="slidenum">
               <a:rPr lang="en-US" smtClean="0"/>
               <a:t>‹#›</a:t>
             </a:fld>
@@ -1461,7 +1461,7 @@
     </p:spTree>
     <p:extLst>
       <p:ext uri="{BB962C8B-B14F-4D97-AF65-F5344CB8AC3E}">
-        <p14:creationId xmlns:p14="http://schemas.microsoft.com/office/powerpoint/2010/main" val="3446650993"/>
+        <p14:creationId xmlns:p14="http://schemas.microsoft.com/office/powerpoint/2010/main" val="438559290"/>
       </p:ext>
     </p:extLst>
   </p:cSld>
@@ -1493,7 +1493,7 @@
           <p:cNvPr id="2" name="Title 1">
             <a:extLst>
               <a:ext uri="{FF2B5EF4-FFF2-40B4-BE49-F238E27FC236}">
-                <a16:creationId xmlns:a16="http://schemas.microsoft.com/office/drawing/2014/main" id="{79FD87C2-89E0-9E08-D453-E7356462ABF7}"/>
+                <a16:creationId xmlns:a16="http://schemas.microsoft.com/office/drawing/2014/main" id="{C4E9B9F5-2F57-FAAA-4029-8DB60019BEFC}"/>
               </a:ext>
             </a:extLst>
           </p:cNvPr>
@@ -1526,7 +1526,7 @@
           <p:cNvPr id="3" name="Text Placeholder 2">
             <a:extLst>
               <a:ext uri="{FF2B5EF4-FFF2-40B4-BE49-F238E27FC236}">
-                <a16:creationId xmlns:a16="http://schemas.microsoft.com/office/drawing/2014/main" id="{462B6E93-A223-9D72-A999-104F502658DD}"/>
+                <a16:creationId xmlns:a16="http://schemas.microsoft.com/office/drawing/2014/main" id="{50B434E2-3635-369C-C26F-DFBF839C4E26}"/>
               </a:ext>
             </a:extLst>
           </p:cNvPr>
@@ -1597,7 +1597,7 @@
           <p:cNvPr id="4" name="Content Placeholder 3">
             <a:extLst>
               <a:ext uri="{FF2B5EF4-FFF2-40B4-BE49-F238E27FC236}">
-                <a16:creationId xmlns:a16="http://schemas.microsoft.com/office/drawing/2014/main" id="{07E5FFC1-17EA-42D7-DBC8-4E13C7061885}"/>
+                <a16:creationId xmlns:a16="http://schemas.microsoft.com/office/drawing/2014/main" id="{A49A6DBC-6FFB-55C1-41E6-2E60E7B4A689}"/>
               </a:ext>
             </a:extLst>
           </p:cNvPr>
@@ -1659,7 +1659,7 @@
           <p:cNvPr id="5" name="Text Placeholder 4">
             <a:extLst>
               <a:ext uri="{FF2B5EF4-FFF2-40B4-BE49-F238E27FC236}">
-                <a16:creationId xmlns:a16="http://schemas.microsoft.com/office/drawing/2014/main" id="{66804756-4CD3-5704-66A3-A4E90E43413E}"/>
+                <a16:creationId xmlns:a16="http://schemas.microsoft.com/office/drawing/2014/main" id="{E7F5A78D-952F-C768-4DBC-6C5BEA17957B}"/>
               </a:ext>
             </a:extLst>
           </p:cNvPr>
@@ -1730,7 +1730,7 @@
           <p:cNvPr id="6" name="Content Placeholder 5">
             <a:extLst>
               <a:ext uri="{FF2B5EF4-FFF2-40B4-BE49-F238E27FC236}">
-                <a16:creationId xmlns:a16="http://schemas.microsoft.com/office/drawing/2014/main" id="{A8676E87-8CEC-B338-076C-1D586EDB2960}"/>
+                <a16:creationId xmlns:a16="http://schemas.microsoft.com/office/drawing/2014/main" id="{D16DA88A-45D0-E816-419B-FADF03613B4C}"/>
               </a:ext>
             </a:extLst>
           </p:cNvPr>
@@ -1792,7 +1792,7 @@
           <p:cNvPr id="7" name="Date Placeholder 6">
             <a:extLst>
               <a:ext uri="{FF2B5EF4-FFF2-40B4-BE49-F238E27FC236}">
-                <a16:creationId xmlns:a16="http://schemas.microsoft.com/office/drawing/2014/main" id="{8226E132-66D8-A9D8-C6D9-9CBDDB0B24F4}"/>
+                <a16:creationId xmlns:a16="http://schemas.microsoft.com/office/drawing/2014/main" id="{B468AB12-FE72-7B7A-66AE-C9FF9D1E225A}"/>
               </a:ext>
             </a:extLst>
           </p:cNvPr>
@@ -1808,7 +1808,7 @@
           <a:bodyPr/>
           <a:lstStyle/>
           <a:p>
-            <a:fld id="{3502B2AD-5CC1-4E7A-A146-BC9782E3E62B}" type="datetimeFigureOut">
+            <a:fld id="{4B285AA2-A1C5-41B4-8ADF-267E3E4B1679}" type="datetimeFigureOut">
               <a:rPr lang="en-US" smtClean="0"/>
               <a:t>6/25/2026</a:t>
             </a:fld>
@@ -1821,7 +1821,7 @@
           <p:cNvPr id="8" name="Footer Placeholder 7">
             <a:extLst>
               <a:ext uri="{FF2B5EF4-FFF2-40B4-BE49-F238E27FC236}">
-                <a16:creationId xmlns:a16="http://schemas.microsoft.com/office/drawing/2014/main" id="{19D019E5-FFEC-88B0-B274-3D0A16BA249D}"/>
+                <a16:creationId xmlns:a16="http://schemas.microsoft.com/office/drawing/2014/main" id="{ABE0CBBF-1750-8887-4069-1C828564BF10}"/>
               </a:ext>
             </a:extLst>
           </p:cNvPr>
@@ -1846,7 +1846,7 @@
           <p:cNvPr id="9" name="Slide Number Placeholder 8">
             <a:extLst>
               <a:ext uri="{FF2B5EF4-FFF2-40B4-BE49-F238E27FC236}">
-                <a16:creationId xmlns:a16="http://schemas.microsoft.com/office/drawing/2014/main" id="{D2108B91-7895-C341-2949-8FEDE543ADEE}"/>
+                <a16:creationId xmlns:a16="http://schemas.microsoft.com/office/drawing/2014/main" id="{052CB143-B3DD-61BB-4B19-A2F6BA3B6916}"/>
               </a:ext>
             </a:extLst>
           </p:cNvPr>
@@ -1862,7 +1862,7 @@
           <a:bodyPr/>
           <a:lstStyle/>
           <a:p>
-            <a:fld id="{C803AEAB-6DBA-4094-9DB7-716E86827953}" type="slidenum">
+            <a:fld id="{89220CC8-2F38-4218-9C39-EDF876764042}" type="slidenum">
               <a:rPr lang="en-US" smtClean="0"/>
               <a:t>‹#›</a:t>
             </a:fld>
@@ -1873,7 +1873,7 @@
     </p:spTree>
     <p:extLst>
       <p:ext uri="{BB962C8B-B14F-4D97-AF65-F5344CB8AC3E}">
-        <p14:creationId xmlns:p14="http://schemas.microsoft.com/office/powerpoint/2010/main" val="1153658197"/>
+        <p14:creationId xmlns:p14="http://schemas.microsoft.com/office/powerpoint/2010/main" val="3320853365"/>
       </p:ext>
     </p:extLst>
   </p:cSld>
@@ -1905,7 +1905,7 @@
           <p:cNvPr id="2" name="Title 1">
             <a:extLst>
               <a:ext uri="{FF2B5EF4-FFF2-40B4-BE49-F238E27FC236}">
-                <a16:creationId xmlns:a16="http://schemas.microsoft.com/office/drawing/2014/main" id="{8B11BBED-83B9-82F3-BF99-3238D0AA1C5A}"/>
+                <a16:creationId xmlns:a16="http://schemas.microsoft.com/office/drawing/2014/main" id="{672381AD-2D09-A2C1-667B-52B972DFD0C1}"/>
               </a:ext>
             </a:extLst>
           </p:cNvPr>
@@ -1933,7 +1933,7 @@
           <p:cNvPr id="3" name="Date Placeholder 2">
             <a:extLst>
               <a:ext uri="{FF2B5EF4-FFF2-40B4-BE49-F238E27FC236}">
-                <a16:creationId xmlns:a16="http://schemas.microsoft.com/office/drawing/2014/main" id="{4D6CB48D-D59A-5056-E812-BD7D069B7364}"/>
+                <a16:creationId xmlns:a16="http://schemas.microsoft.com/office/drawing/2014/main" id="{4895B4AC-0BF1-9C64-FAF4-0BC5567BABAC}"/>
               </a:ext>
             </a:extLst>
           </p:cNvPr>
@@ -1949,7 +1949,7 @@
           <a:bodyPr/>
           <a:lstStyle/>
           <a:p>
-            <a:fld id="{3502B2AD-5CC1-4E7A-A146-BC9782E3E62B}" type="datetimeFigureOut">
+            <a:fld id="{4B285AA2-A1C5-41B4-8ADF-267E3E4B1679}" type="datetimeFigureOut">
               <a:rPr lang="en-US" smtClean="0"/>
               <a:t>6/25/2026</a:t>
             </a:fld>
@@ -1962,7 +1962,7 @@
           <p:cNvPr id="4" name="Footer Placeholder 3">
             <a:extLst>
               <a:ext uri="{FF2B5EF4-FFF2-40B4-BE49-F238E27FC236}">
-                <a16:creationId xmlns:a16="http://schemas.microsoft.com/office/drawing/2014/main" id="{D2DC3E1A-6C01-C623-009A-BCAEA392F1F2}"/>
+                <a16:creationId xmlns:a16="http://schemas.microsoft.com/office/drawing/2014/main" id="{26584974-48D1-02F1-0A95-7080EAFC5933}"/>
               </a:ext>
             </a:extLst>
           </p:cNvPr>
@@ -1987,7 +1987,7 @@
           <p:cNvPr id="5" name="Slide Number Placeholder 4">
             <a:extLst>
               <a:ext uri="{FF2B5EF4-FFF2-40B4-BE49-F238E27FC236}">
-                <a16:creationId xmlns:a16="http://schemas.microsoft.com/office/drawing/2014/main" id="{6F273277-75C2-5011-03B4-A8B4F0C9384A}"/>
+                <a16:creationId xmlns:a16="http://schemas.microsoft.com/office/drawing/2014/main" id="{A66203E2-E9DE-05ED-E82F-8C017789FE2A}"/>
               </a:ext>
             </a:extLst>
           </p:cNvPr>
@@ -2003,7 +2003,7 @@
           <a:bodyPr/>
           <a:lstStyle/>
           <a:p>
-            <a:fld id="{C803AEAB-6DBA-4094-9DB7-716E86827953}" type="slidenum">
+            <a:fld id="{89220CC8-2F38-4218-9C39-EDF876764042}" type="slidenum">
               <a:rPr lang="en-US" smtClean="0"/>
               <a:t>‹#›</a:t>
             </a:fld>
@@ -2014,7 +2014,7 @@
     </p:spTree>
     <p:extLst>
       <p:ext uri="{BB962C8B-B14F-4D97-AF65-F5344CB8AC3E}">
-        <p14:creationId xmlns:p14="http://schemas.microsoft.com/office/powerpoint/2010/main" val="2761589868"/>
+        <p14:creationId xmlns:p14="http://schemas.microsoft.com/office/powerpoint/2010/main" val="909282292"/>
       </p:ext>
     </p:extLst>
   </p:cSld>
@@ -2046,7 +2046,7 @@
           <p:cNvPr id="2" name="Date Placeholder 1">
             <a:extLst>
               <a:ext uri="{FF2B5EF4-FFF2-40B4-BE49-F238E27FC236}">
-                <a16:creationId xmlns:a16="http://schemas.microsoft.com/office/drawing/2014/main" id="{0E837290-D028-ED0B-CDA6-1E1179D2D91C}"/>
+                <a16:creationId xmlns:a16="http://schemas.microsoft.com/office/drawing/2014/main" id="{16D0A48C-CC22-8F13-362E-AFA0926E3C0A}"/>
               </a:ext>
             </a:extLst>
           </p:cNvPr>
@@ -2062,7 +2062,7 @@
           <a:bodyPr/>
           <a:lstStyle/>
           <a:p>
-            <a:fld id="{3502B2AD-5CC1-4E7A-A146-BC9782E3E62B}" type="datetimeFigureOut">
+            <a:fld id="{4B285AA2-A1C5-41B4-8ADF-267E3E4B1679}" type="datetimeFigureOut">
               <a:rPr lang="en-US" smtClean="0"/>
               <a:t>6/25/2026</a:t>
             </a:fld>
@@ -2075,7 +2075,7 @@
           <p:cNvPr id="3" name="Footer Placeholder 2">
             <a:extLst>
               <a:ext uri="{FF2B5EF4-FFF2-40B4-BE49-F238E27FC236}">
-                <a16:creationId xmlns:a16="http://schemas.microsoft.com/office/drawing/2014/main" id="{05405762-9B64-46F9-8B3B-04D7478A5FE0}"/>
+                <a16:creationId xmlns:a16="http://schemas.microsoft.com/office/drawing/2014/main" id="{6672F4AD-3BF8-8743-D256-5A9A101A5BF6}"/>
               </a:ext>
             </a:extLst>
           </p:cNvPr>
@@ -2100,7 +2100,7 @@
           <p:cNvPr id="4" name="Slide Number Placeholder 3">
             <a:extLst>
               <a:ext uri="{FF2B5EF4-FFF2-40B4-BE49-F238E27FC236}">
-                <a16:creationId xmlns:a16="http://schemas.microsoft.com/office/drawing/2014/main" id="{36A40E45-0A96-BDFB-3938-1BB2EB2D8FD6}"/>
+                <a16:creationId xmlns:a16="http://schemas.microsoft.com/office/drawing/2014/main" id="{310498F1-337D-3606-D618-B78EB699EFD6}"/>
               </a:ext>
             </a:extLst>
           </p:cNvPr>
@@ -2116,7 +2116,7 @@
           <a:bodyPr/>
           <a:lstStyle/>
           <a:p>
-            <a:fld id="{C803AEAB-6DBA-4094-9DB7-716E86827953}" type="slidenum">
+            <a:fld id="{89220CC8-2F38-4218-9C39-EDF876764042}" type="slidenum">
               <a:rPr lang="en-US" smtClean="0"/>
               <a:t>‹#›</a:t>
             </a:fld>
@@ -2127,7 +2127,7 @@
     </p:spTree>
     <p:extLst>
       <p:ext uri="{BB962C8B-B14F-4D97-AF65-F5344CB8AC3E}">
-        <p14:creationId xmlns:p14="http://schemas.microsoft.com/office/powerpoint/2010/main" val="3443035529"/>
+        <p14:creationId xmlns:p14="http://schemas.microsoft.com/office/powerpoint/2010/main" val="156926323"/>
       </p:ext>
     </p:extLst>
   </p:cSld>
@@ -2159,7 +2159,7 @@
           <p:cNvPr id="2" name="Title 1">
             <a:extLst>
               <a:ext uri="{FF2B5EF4-FFF2-40B4-BE49-F238E27FC236}">
-                <a16:creationId xmlns:a16="http://schemas.microsoft.com/office/drawing/2014/main" id="{ED288BCB-A192-55BC-CEAE-2DC55A4D3708}"/>
+                <a16:creationId xmlns:a16="http://schemas.microsoft.com/office/drawing/2014/main" id="{1EEB0F46-FC5D-C240-E5B5-5E132A3DD512}"/>
               </a:ext>
             </a:extLst>
           </p:cNvPr>
@@ -2196,7 +2196,7 @@
           <p:cNvPr id="3" name="Content Placeholder 2">
             <a:extLst>
               <a:ext uri="{FF2B5EF4-FFF2-40B4-BE49-F238E27FC236}">
-                <a16:creationId xmlns:a16="http://schemas.microsoft.com/office/drawing/2014/main" id="{59EA1D11-4080-F542-BB32-41061E942338}"/>
+                <a16:creationId xmlns:a16="http://schemas.microsoft.com/office/drawing/2014/main" id="{1E1F0BB6-E56F-F39E-AB6E-7AC08009CDD8}"/>
               </a:ext>
             </a:extLst>
           </p:cNvPr>
@@ -2286,7 +2286,7 @@
           <p:cNvPr id="4" name="Text Placeholder 3">
             <a:extLst>
               <a:ext uri="{FF2B5EF4-FFF2-40B4-BE49-F238E27FC236}">
-                <a16:creationId xmlns:a16="http://schemas.microsoft.com/office/drawing/2014/main" id="{21D605AD-9D02-2BB5-0D7F-649C3096EF25}"/>
+                <a16:creationId xmlns:a16="http://schemas.microsoft.com/office/drawing/2014/main" id="{C9061B8A-5531-C47C-FC82-EF8781AEF5F8}"/>
               </a:ext>
             </a:extLst>
           </p:cNvPr>
@@ -2357,7 +2357,7 @@
           <p:cNvPr id="5" name="Date Placeholder 4">
             <a:extLst>
               <a:ext uri="{FF2B5EF4-FFF2-40B4-BE49-F238E27FC236}">
-                <a16:creationId xmlns:a16="http://schemas.microsoft.com/office/drawing/2014/main" id="{A769AF28-F625-3047-67FB-D221541BBC4E}"/>
+                <a16:creationId xmlns:a16="http://schemas.microsoft.com/office/drawing/2014/main" id="{6468C055-CC7E-963F-04F4-2CE602095FF7}"/>
               </a:ext>
             </a:extLst>
           </p:cNvPr>
@@ -2373,7 +2373,7 @@
           <a:bodyPr/>
           <a:lstStyle/>
           <a:p>
-            <a:fld id="{3502B2AD-5CC1-4E7A-A146-BC9782E3E62B}" type="datetimeFigureOut">
+            <a:fld id="{4B285AA2-A1C5-41B4-8ADF-267E3E4B1679}" type="datetimeFigureOut">
               <a:rPr lang="en-US" smtClean="0"/>
               <a:t>6/25/2026</a:t>
             </a:fld>
@@ -2386,7 +2386,7 @@
           <p:cNvPr id="6" name="Footer Placeholder 5">
             <a:extLst>
               <a:ext uri="{FF2B5EF4-FFF2-40B4-BE49-F238E27FC236}">
-                <a16:creationId xmlns:a16="http://schemas.microsoft.com/office/drawing/2014/main" id="{02222984-0ABE-11F5-20FC-4C6660D4108A}"/>
+                <a16:creationId xmlns:a16="http://schemas.microsoft.com/office/drawing/2014/main" id="{B97F6A78-A209-1B40-0EF3-2076C3FB2FBD}"/>
               </a:ext>
             </a:extLst>
           </p:cNvPr>
@@ -2411,7 +2411,7 @@
           <p:cNvPr id="7" name="Slide Number Placeholder 6">
             <a:extLst>
               <a:ext uri="{FF2B5EF4-FFF2-40B4-BE49-F238E27FC236}">
-                <a16:creationId xmlns:a16="http://schemas.microsoft.com/office/drawing/2014/main" id="{C931D549-AF32-398E-19A4-69E77A5B95F1}"/>
+                <a16:creationId xmlns:a16="http://schemas.microsoft.com/office/drawing/2014/main" id="{F0DB90E6-CD90-2FC6-8401-2478AD81DD14}"/>
               </a:ext>
             </a:extLst>
           </p:cNvPr>
@@ -2427,7 +2427,7 @@
           <a:bodyPr/>
           <a:lstStyle/>
           <a:p>
-            <a:fld id="{C803AEAB-6DBA-4094-9DB7-716E86827953}" type="slidenum">
+            <a:fld id="{89220CC8-2F38-4218-9C39-EDF876764042}" type="slidenum">
               <a:rPr lang="en-US" smtClean="0"/>
               <a:t>‹#›</a:t>
             </a:fld>
@@ -2438,7 +2438,7 @@
     </p:spTree>
     <p:extLst>
       <p:ext uri="{BB962C8B-B14F-4D97-AF65-F5344CB8AC3E}">
-        <p14:creationId xmlns:p14="http://schemas.microsoft.com/office/powerpoint/2010/main" val="3709657965"/>
+        <p14:creationId xmlns:p14="http://schemas.microsoft.com/office/powerpoint/2010/main" val="2173247720"/>
       </p:ext>
     </p:extLst>
   </p:cSld>
@@ -2470,7 +2470,7 @@
           <p:cNvPr id="2" name="Title 1">
             <a:extLst>
               <a:ext uri="{FF2B5EF4-FFF2-40B4-BE49-F238E27FC236}">
-                <a16:creationId xmlns:a16="http://schemas.microsoft.com/office/drawing/2014/main" id="{4A54ABFB-115B-A942-EA71-CDD0E31DCB9F}"/>
+                <a16:creationId xmlns:a16="http://schemas.microsoft.com/office/drawing/2014/main" id="{38490EC8-DC29-AA73-EB35-637310434CC7}"/>
               </a:ext>
             </a:extLst>
           </p:cNvPr>
@@ -2507,7 +2507,7 @@
           <p:cNvPr id="3" name="Picture Placeholder 2">
             <a:extLst>
               <a:ext uri="{FF2B5EF4-FFF2-40B4-BE49-F238E27FC236}">
-                <a16:creationId xmlns:a16="http://schemas.microsoft.com/office/drawing/2014/main" id="{52EE0104-AE67-981E-DB21-FE51E02E3971}"/>
+                <a16:creationId xmlns:a16="http://schemas.microsoft.com/office/drawing/2014/main" id="{851D06E3-2F05-D56E-03D9-BE2E05E5920D}"/>
               </a:ext>
             </a:extLst>
           </p:cNvPr>
@@ -2574,7 +2574,7 @@
           <p:cNvPr id="4" name="Text Placeholder 3">
             <a:extLst>
               <a:ext uri="{FF2B5EF4-FFF2-40B4-BE49-F238E27FC236}">
-                <a16:creationId xmlns:a16="http://schemas.microsoft.com/office/drawing/2014/main" id="{F4DA1379-A98B-6642-56CE-356221B18198}"/>
+                <a16:creationId xmlns:a16="http://schemas.microsoft.com/office/drawing/2014/main" id="{AFBE4C63-0376-6929-1C58-3012CFD8992D}"/>
               </a:ext>
             </a:extLst>
           </p:cNvPr>
@@ -2645,7 +2645,7 @@
           <p:cNvPr id="5" name="Date Placeholder 4">
             <a:extLst>
               <a:ext uri="{FF2B5EF4-FFF2-40B4-BE49-F238E27FC236}">
-                <a16:creationId xmlns:a16="http://schemas.microsoft.com/office/drawing/2014/main" id="{BD508F93-2262-B276-A523-DCEC8EDA5A28}"/>
+                <a16:creationId xmlns:a16="http://schemas.microsoft.com/office/drawing/2014/main" id="{12EA35AC-F97A-A400-5E13-D0C05D5F2054}"/>
               </a:ext>
             </a:extLst>
           </p:cNvPr>
@@ -2661,7 +2661,7 @@
           <a:bodyPr/>
           <a:lstStyle/>
           <a:p>
-            <a:fld id="{3502B2AD-5CC1-4E7A-A146-BC9782E3E62B}" type="datetimeFigureOut">
+            <a:fld id="{4B285AA2-A1C5-41B4-8ADF-267E3E4B1679}" type="datetimeFigureOut">
               <a:rPr lang="en-US" smtClean="0"/>
               <a:t>6/25/2026</a:t>
             </a:fld>
@@ -2674,7 +2674,7 @@
           <p:cNvPr id="6" name="Footer Placeholder 5">
             <a:extLst>
               <a:ext uri="{FF2B5EF4-FFF2-40B4-BE49-F238E27FC236}">
-                <a16:creationId xmlns:a16="http://schemas.microsoft.com/office/drawing/2014/main" id="{137D174B-9364-6277-3B8C-C91BB1AFC609}"/>
+                <a16:creationId xmlns:a16="http://schemas.microsoft.com/office/drawing/2014/main" id="{400ACAE1-81F9-8CAD-1C5F-59B59848D907}"/>
               </a:ext>
             </a:extLst>
           </p:cNvPr>
@@ -2699,7 +2699,7 @@
           <p:cNvPr id="7" name="Slide Number Placeholder 6">
             <a:extLst>
               <a:ext uri="{FF2B5EF4-FFF2-40B4-BE49-F238E27FC236}">
-                <a16:creationId xmlns:a16="http://schemas.microsoft.com/office/drawing/2014/main" id="{BAC87DF9-8C62-17FD-E68D-1B203CB358AB}"/>
+                <a16:creationId xmlns:a16="http://schemas.microsoft.com/office/drawing/2014/main" id="{3142790D-A1A4-20DD-8E43-4BE0595045BC}"/>
               </a:ext>
             </a:extLst>
           </p:cNvPr>
@@ -2715,7 +2715,7 @@
           <a:bodyPr/>
           <a:lstStyle/>
           <a:p>
-            <a:fld id="{C803AEAB-6DBA-4094-9DB7-716E86827953}" type="slidenum">
+            <a:fld id="{89220CC8-2F38-4218-9C39-EDF876764042}" type="slidenum">
               <a:rPr lang="en-US" smtClean="0"/>
               <a:t>‹#›</a:t>
             </a:fld>
@@ -2726,7 +2726,7 @@
     </p:spTree>
     <p:extLst>
       <p:ext uri="{BB962C8B-B14F-4D97-AF65-F5344CB8AC3E}">
-        <p14:creationId xmlns:p14="http://schemas.microsoft.com/office/powerpoint/2010/main" val="1436525498"/>
+        <p14:creationId xmlns:p14="http://schemas.microsoft.com/office/powerpoint/2010/main" val="243120986"/>
       </p:ext>
     </p:extLst>
   </p:cSld>
@@ -2763,7 +2763,7 @@
           <p:cNvPr id="2" name="Title Placeholder 1">
             <a:extLst>
               <a:ext uri="{FF2B5EF4-FFF2-40B4-BE49-F238E27FC236}">
-                <a16:creationId xmlns:a16="http://schemas.microsoft.com/office/drawing/2014/main" id="{83091529-7832-C22A-9AE3-2ABCA21087AE}"/>
+                <a16:creationId xmlns:a16="http://schemas.microsoft.com/office/drawing/2014/main" id="{1BC91327-6365-1B29-F76B-3C282E9B9502}"/>
               </a:ext>
             </a:extLst>
           </p:cNvPr>
@@ -2801,7 +2801,7 @@
           <p:cNvPr id="3" name="Text Placeholder 2">
             <a:extLst>
               <a:ext uri="{FF2B5EF4-FFF2-40B4-BE49-F238E27FC236}">
-                <a16:creationId xmlns:a16="http://schemas.microsoft.com/office/drawing/2014/main" id="{548F4FFC-DE73-CF7A-160B-777BF6988889}"/>
+                <a16:creationId xmlns:a16="http://schemas.microsoft.com/office/drawing/2014/main" id="{367A9037-A8E0-A8D8-F173-A0AC5E4666B3}"/>
               </a:ext>
             </a:extLst>
           </p:cNvPr>
@@ -2868,7 +2868,7 @@
           <p:cNvPr id="4" name="Date Placeholder 3">
             <a:extLst>
               <a:ext uri="{FF2B5EF4-FFF2-40B4-BE49-F238E27FC236}">
-                <a16:creationId xmlns:a16="http://schemas.microsoft.com/office/drawing/2014/main" id="{F55277EE-D041-BFAD-854A-B2782023AEA4}"/>
+                <a16:creationId xmlns:a16="http://schemas.microsoft.com/office/drawing/2014/main" id="{278DA2A7-053F-F729-ED4C-E7532EEA9A43}"/>
               </a:ext>
             </a:extLst>
           </p:cNvPr>
@@ -2902,7 +2902,7 @@
             </a:lvl1pPr>
           </a:lstStyle>
           <a:p>
-            <a:fld id="{3502B2AD-5CC1-4E7A-A146-BC9782E3E62B}" type="datetimeFigureOut">
+            <a:fld id="{4B285AA2-A1C5-41B4-8ADF-267E3E4B1679}" type="datetimeFigureOut">
               <a:rPr lang="en-US" smtClean="0"/>
               <a:t>6/25/2026</a:t>
             </a:fld>
@@ -2915,7 +2915,7 @@
           <p:cNvPr id="5" name="Footer Placeholder 4">
             <a:extLst>
               <a:ext uri="{FF2B5EF4-FFF2-40B4-BE49-F238E27FC236}">
-                <a16:creationId xmlns:a16="http://schemas.microsoft.com/office/drawing/2014/main" id="{CF2E3FA5-8F66-1200-12DB-97DE3A8A3B67}"/>
+                <a16:creationId xmlns:a16="http://schemas.microsoft.com/office/drawing/2014/main" id="{7612CA81-18E4-AD18-F809-2823938E3E3D}"/>
               </a:ext>
             </a:extLst>
           </p:cNvPr>
@@ -2958,7 +2958,7 @@
           <p:cNvPr id="6" name="Slide Number Placeholder 5">
             <a:extLst>
               <a:ext uri="{FF2B5EF4-FFF2-40B4-BE49-F238E27FC236}">
-                <a16:creationId xmlns:a16="http://schemas.microsoft.com/office/drawing/2014/main" id="{2092AF58-3384-8B58-E6EF-4541B6735BC7}"/>
+                <a16:creationId xmlns:a16="http://schemas.microsoft.com/office/drawing/2014/main" id="{022752DF-0691-D02A-7A9B-40F1FBE44A0C}"/>
               </a:ext>
             </a:extLst>
           </p:cNvPr>
@@ -2992,7 +2992,7 @@
             </a:lvl1pPr>
           </a:lstStyle>
           <a:p>
-            <a:fld id="{C803AEAB-6DBA-4094-9DB7-716E86827953}" type="slidenum">
+            <a:fld id="{89220CC8-2F38-4218-9C39-EDF876764042}" type="slidenum">
               <a:rPr lang="en-US" smtClean="0"/>
               <a:t>‹#›</a:t>
             </a:fld>
@@ -3003,7 +3003,7 @@
     </p:spTree>
     <p:extLst>
       <p:ext uri="{BB962C8B-B14F-4D97-AF65-F5344CB8AC3E}">
-        <p14:creationId xmlns:p14="http://schemas.microsoft.com/office/powerpoint/2010/main" val="2625530733"/>
+        <p14:creationId xmlns:p14="http://schemas.microsoft.com/office/powerpoint/2010/main" val="3985743317"/>
       </p:ext>
     </p:extLst>
   </p:cSld>
@@ -3326,7 +3326,7 @@
           <p:cNvPr id="2" name="Rectangle">
             <a:extLst>
               <a:ext uri="{FF2B5EF4-FFF2-40B4-BE49-F238E27FC236}">
-                <a16:creationId xmlns:a16="http://schemas.microsoft.com/office/drawing/2014/main" id="{5F1360F0-58A4-A2EE-EEC3-300A2BB982CC}"/>
+                <a16:creationId xmlns:a16="http://schemas.microsoft.com/office/drawing/2014/main" id="{9F3812C2-FAAD-3F6E-9022-DC3ED0DFF0C5}"/>
               </a:ext>
             </a:extLst>
           </p:cNvPr>
@@ -3387,7 +3387,7 @@
           <p:cNvPr id="3" name="RoundedRect">
             <a:extLst>
               <a:ext uri="{FF2B5EF4-FFF2-40B4-BE49-F238E27FC236}">
-                <a16:creationId xmlns:a16="http://schemas.microsoft.com/office/drawing/2014/main" id="{3DE75BC3-19B5-0413-2CBC-070F9F25F7F9}"/>
+                <a16:creationId xmlns:a16="http://schemas.microsoft.com/office/drawing/2014/main" id="{1777266B-F8AC-F314-406E-79E2FBE6C5E6}"/>
               </a:ext>
             </a:extLst>
           </p:cNvPr>
@@ -3448,7 +3448,7 @@
           <p:cNvPr id="4" name="Ellipse">
             <a:extLst>
               <a:ext uri="{FF2B5EF4-FFF2-40B4-BE49-F238E27FC236}">
-                <a16:creationId xmlns:a16="http://schemas.microsoft.com/office/drawing/2014/main" id="{EE0B69DF-C4A4-C6F7-BEFE-686AB4ECC5B7}"/>
+                <a16:creationId xmlns:a16="http://schemas.microsoft.com/office/drawing/2014/main" id="{9C7624CD-BEE9-A9C3-3B10-CDDC87B4763B}"/>
               </a:ext>
             </a:extLst>
           </p:cNvPr>
@@ -3509,7 +3509,7 @@
           <p:cNvPr id="5" name="Chevron">
             <a:extLst>
               <a:ext uri="{FF2B5EF4-FFF2-40B4-BE49-F238E27FC236}">
-                <a16:creationId xmlns:a16="http://schemas.microsoft.com/office/drawing/2014/main" id="{F1517A8D-A975-7C1B-7619-0D2021C1953C}"/>
+                <a16:creationId xmlns:a16="http://schemas.microsoft.com/office/drawing/2014/main" id="{C2A79F3E-E6AE-24E1-2796-13137FC48D01}"/>
               </a:ext>
             </a:extLst>
           </p:cNvPr>
@@ -3568,7 +3568,7 @@
     </p:spTree>
     <p:extLst>
       <p:ext uri="{BB962C8B-B14F-4D97-AF65-F5344CB8AC3E}">
-        <p14:creationId xmlns:p14="http://schemas.microsoft.com/office/powerpoint/2010/main" val="3221786323"/>
+        <p14:creationId xmlns:p14="http://schemas.microsoft.com/office/powerpoint/2010/main" val="3508049266"/>
       </p:ext>
     </p:extLst>
   </p:cSld>

--- a/tools/FreeP.RenderCompare/corpus/02-autoshapes.pptx
+++ b/tools/FreeP.RenderCompare/corpus/02-autoshapes.pptx
@@ -129,7 +129,7 @@
           <p:cNvPr id="2" name="Title 1">
             <a:extLst>
               <a:ext uri="{FF2B5EF4-FFF2-40B4-BE49-F238E27FC236}">
-                <a16:creationId xmlns:a16="http://schemas.microsoft.com/office/drawing/2014/main" id="{D46D49D4-8CE2-24B5-01FD-C1677306E708}"/>
+                <a16:creationId xmlns:a16="http://schemas.microsoft.com/office/drawing/2014/main" id="{C7AB3403-274D-E9C7-076A-42937A1113B2}"/>
               </a:ext>
             </a:extLst>
           </p:cNvPr>
@@ -166,7 +166,7 @@
           <p:cNvPr id="3" name="Subtitle 2">
             <a:extLst>
               <a:ext uri="{FF2B5EF4-FFF2-40B4-BE49-F238E27FC236}">
-                <a16:creationId xmlns:a16="http://schemas.microsoft.com/office/drawing/2014/main" id="{4324BA82-D8F6-2526-232F-D99740689283}"/>
+                <a16:creationId xmlns:a16="http://schemas.microsoft.com/office/drawing/2014/main" id="{2D50DC28-B2C1-2512-315E-2B0046C7D4C9}"/>
               </a:ext>
             </a:extLst>
           </p:cNvPr>
@@ -236,7 +236,7 @@
           <p:cNvPr id="4" name="Date Placeholder 3">
             <a:extLst>
               <a:ext uri="{FF2B5EF4-FFF2-40B4-BE49-F238E27FC236}">
-                <a16:creationId xmlns:a16="http://schemas.microsoft.com/office/drawing/2014/main" id="{365D9985-FE9C-B61E-3A9A-20322C6852EF}"/>
+                <a16:creationId xmlns:a16="http://schemas.microsoft.com/office/drawing/2014/main" id="{7956D9D4-682D-EC97-7C38-F195AD59F400}"/>
               </a:ext>
             </a:extLst>
           </p:cNvPr>
@@ -252,9 +252,9 @@
           <a:bodyPr/>
           <a:lstStyle/>
           <a:p>
-            <a:fld id="{4B285AA2-A1C5-41B4-8ADF-267E3E4B1679}" type="datetimeFigureOut">
+            <a:fld id="{F6582FEC-1620-427C-8DE5-C470062BED34}" type="datetimeFigureOut">
               <a:rPr lang="en-US" smtClean="0"/>
-              <a:t>6/25/2026</a:t>
+              <a:t>6/26/2026</a:t>
             </a:fld>
             <a:endParaRPr lang="en-US"/>
           </a:p>
@@ -265,7 +265,7 @@
           <p:cNvPr id="5" name="Footer Placeholder 4">
             <a:extLst>
               <a:ext uri="{FF2B5EF4-FFF2-40B4-BE49-F238E27FC236}">
-                <a16:creationId xmlns:a16="http://schemas.microsoft.com/office/drawing/2014/main" id="{19939D74-74FC-5B34-6A7D-6A31E075537D}"/>
+                <a16:creationId xmlns:a16="http://schemas.microsoft.com/office/drawing/2014/main" id="{44342D5D-4F67-E229-1DC7-6ED3757F00B6}"/>
               </a:ext>
             </a:extLst>
           </p:cNvPr>
@@ -290,7 +290,7 @@
           <p:cNvPr id="6" name="Slide Number Placeholder 5">
             <a:extLst>
               <a:ext uri="{FF2B5EF4-FFF2-40B4-BE49-F238E27FC236}">
-                <a16:creationId xmlns:a16="http://schemas.microsoft.com/office/drawing/2014/main" id="{F4CE6B8B-103F-5158-294F-133D1A171327}"/>
+                <a16:creationId xmlns:a16="http://schemas.microsoft.com/office/drawing/2014/main" id="{F32729FA-1E01-EA46-A7F5-B7E1801E3DC0}"/>
               </a:ext>
             </a:extLst>
           </p:cNvPr>
@@ -306,7 +306,7 @@
           <a:bodyPr/>
           <a:lstStyle/>
           <a:p>
-            <a:fld id="{89220CC8-2F38-4218-9C39-EDF876764042}" type="slidenum">
+            <a:fld id="{FCD4687A-586F-4373-9B75-44E1B3037E08}" type="slidenum">
               <a:rPr lang="en-US" smtClean="0"/>
               <a:t>‹#›</a:t>
             </a:fld>
@@ -317,7 +317,7 @@
     </p:spTree>
     <p:extLst>
       <p:ext uri="{BB962C8B-B14F-4D97-AF65-F5344CB8AC3E}">
-        <p14:creationId xmlns:p14="http://schemas.microsoft.com/office/powerpoint/2010/main" val="3089146396"/>
+        <p14:creationId xmlns:p14="http://schemas.microsoft.com/office/powerpoint/2010/main" val="3201151534"/>
       </p:ext>
     </p:extLst>
   </p:cSld>
@@ -349,7 +349,7 @@
           <p:cNvPr id="2" name="Title 1">
             <a:extLst>
               <a:ext uri="{FF2B5EF4-FFF2-40B4-BE49-F238E27FC236}">
-                <a16:creationId xmlns:a16="http://schemas.microsoft.com/office/drawing/2014/main" id="{B8FF741A-F36C-3FD8-B4FB-0A1BF990B1F5}"/>
+                <a16:creationId xmlns:a16="http://schemas.microsoft.com/office/drawing/2014/main" id="{2ADC0A40-46BA-5EEA-6462-0FED90623543}"/>
               </a:ext>
             </a:extLst>
           </p:cNvPr>
@@ -377,7 +377,7 @@
           <p:cNvPr id="3" name="Vertical Text Placeholder 2">
             <a:extLst>
               <a:ext uri="{FF2B5EF4-FFF2-40B4-BE49-F238E27FC236}">
-                <a16:creationId xmlns:a16="http://schemas.microsoft.com/office/drawing/2014/main" id="{FE639EB9-2A5A-15A5-A07E-7E200F014BCD}"/>
+                <a16:creationId xmlns:a16="http://schemas.microsoft.com/office/drawing/2014/main" id="{7F9CECD4-6C3D-94CE-F728-CD32AA3F59F0}"/>
               </a:ext>
             </a:extLst>
           </p:cNvPr>
@@ -434,7 +434,7 @@
           <p:cNvPr id="4" name="Date Placeholder 3">
             <a:extLst>
               <a:ext uri="{FF2B5EF4-FFF2-40B4-BE49-F238E27FC236}">
-                <a16:creationId xmlns:a16="http://schemas.microsoft.com/office/drawing/2014/main" id="{2AB02C54-6BCA-1CDD-538A-6B52537974D0}"/>
+                <a16:creationId xmlns:a16="http://schemas.microsoft.com/office/drawing/2014/main" id="{83466E68-384E-074C-0FD3-3D85C74D34FE}"/>
               </a:ext>
             </a:extLst>
           </p:cNvPr>
@@ -450,9 +450,9 @@
           <a:bodyPr/>
           <a:lstStyle/>
           <a:p>
-            <a:fld id="{4B285AA2-A1C5-41B4-8ADF-267E3E4B1679}" type="datetimeFigureOut">
+            <a:fld id="{F6582FEC-1620-427C-8DE5-C470062BED34}" type="datetimeFigureOut">
               <a:rPr lang="en-US" smtClean="0"/>
-              <a:t>6/25/2026</a:t>
+              <a:t>6/26/2026</a:t>
             </a:fld>
             <a:endParaRPr lang="en-US"/>
           </a:p>
@@ -463,7 +463,7 @@
           <p:cNvPr id="5" name="Footer Placeholder 4">
             <a:extLst>
               <a:ext uri="{FF2B5EF4-FFF2-40B4-BE49-F238E27FC236}">
-                <a16:creationId xmlns:a16="http://schemas.microsoft.com/office/drawing/2014/main" id="{D8090C14-0496-284E-5A58-E4CE19639EB4}"/>
+                <a16:creationId xmlns:a16="http://schemas.microsoft.com/office/drawing/2014/main" id="{5BB38928-C4D5-3F7E-BB22-3A56BC7F16C5}"/>
               </a:ext>
             </a:extLst>
           </p:cNvPr>
@@ -488,7 +488,7 @@
           <p:cNvPr id="6" name="Slide Number Placeholder 5">
             <a:extLst>
               <a:ext uri="{FF2B5EF4-FFF2-40B4-BE49-F238E27FC236}">
-                <a16:creationId xmlns:a16="http://schemas.microsoft.com/office/drawing/2014/main" id="{F56C7EC9-57EF-FDC7-6C1C-E4AE8CA830D6}"/>
+                <a16:creationId xmlns:a16="http://schemas.microsoft.com/office/drawing/2014/main" id="{C4F5463A-8B74-6AE7-7008-1F96CBD192A1}"/>
               </a:ext>
             </a:extLst>
           </p:cNvPr>
@@ -504,7 +504,7 @@
           <a:bodyPr/>
           <a:lstStyle/>
           <a:p>
-            <a:fld id="{89220CC8-2F38-4218-9C39-EDF876764042}" type="slidenum">
+            <a:fld id="{FCD4687A-586F-4373-9B75-44E1B3037E08}" type="slidenum">
               <a:rPr lang="en-US" smtClean="0"/>
               <a:t>‹#›</a:t>
             </a:fld>
@@ -515,7 +515,7 @@
     </p:spTree>
     <p:extLst>
       <p:ext uri="{BB962C8B-B14F-4D97-AF65-F5344CB8AC3E}">
-        <p14:creationId xmlns:p14="http://schemas.microsoft.com/office/powerpoint/2010/main" val="3849391624"/>
+        <p14:creationId xmlns:p14="http://schemas.microsoft.com/office/powerpoint/2010/main" val="325611588"/>
       </p:ext>
     </p:extLst>
   </p:cSld>
@@ -547,7 +547,7 @@
           <p:cNvPr id="2" name="Vertical Title 1">
             <a:extLst>
               <a:ext uri="{FF2B5EF4-FFF2-40B4-BE49-F238E27FC236}">
-                <a16:creationId xmlns:a16="http://schemas.microsoft.com/office/drawing/2014/main" id="{0C1FACCA-B748-4BDD-D74E-1794070CC2CC}"/>
+                <a16:creationId xmlns:a16="http://schemas.microsoft.com/office/drawing/2014/main" id="{9356D7F2-BAE6-A64A-6743-9E412567E241}"/>
               </a:ext>
             </a:extLst>
           </p:cNvPr>
@@ -580,7 +580,7 @@
           <p:cNvPr id="3" name="Vertical Text Placeholder 2">
             <a:extLst>
               <a:ext uri="{FF2B5EF4-FFF2-40B4-BE49-F238E27FC236}">
-                <a16:creationId xmlns:a16="http://schemas.microsoft.com/office/drawing/2014/main" id="{EBA9458A-4BF0-284B-4139-A87D4FC33B9F}"/>
+                <a16:creationId xmlns:a16="http://schemas.microsoft.com/office/drawing/2014/main" id="{9734BBCA-4CCA-C4FE-10E7-C54B9BA7485B}"/>
               </a:ext>
             </a:extLst>
           </p:cNvPr>
@@ -642,7 +642,7 @@
           <p:cNvPr id="4" name="Date Placeholder 3">
             <a:extLst>
               <a:ext uri="{FF2B5EF4-FFF2-40B4-BE49-F238E27FC236}">
-                <a16:creationId xmlns:a16="http://schemas.microsoft.com/office/drawing/2014/main" id="{4074E148-183C-F11A-5033-5503C453C2E5}"/>
+                <a16:creationId xmlns:a16="http://schemas.microsoft.com/office/drawing/2014/main" id="{7ABAD78D-AD55-D77C-2C59-3A8E0D16F095}"/>
               </a:ext>
             </a:extLst>
           </p:cNvPr>
@@ -658,9 +658,9 @@
           <a:bodyPr/>
           <a:lstStyle/>
           <a:p>
-            <a:fld id="{4B285AA2-A1C5-41B4-8ADF-267E3E4B1679}" type="datetimeFigureOut">
+            <a:fld id="{F6582FEC-1620-427C-8DE5-C470062BED34}" type="datetimeFigureOut">
               <a:rPr lang="en-US" smtClean="0"/>
-              <a:t>6/25/2026</a:t>
+              <a:t>6/26/2026</a:t>
             </a:fld>
             <a:endParaRPr lang="en-US"/>
           </a:p>
@@ -671,7 +671,7 @@
           <p:cNvPr id="5" name="Footer Placeholder 4">
             <a:extLst>
               <a:ext uri="{FF2B5EF4-FFF2-40B4-BE49-F238E27FC236}">
-                <a16:creationId xmlns:a16="http://schemas.microsoft.com/office/drawing/2014/main" id="{BCADD32F-A638-A9AC-CE93-E2DB759157D2}"/>
+                <a16:creationId xmlns:a16="http://schemas.microsoft.com/office/drawing/2014/main" id="{02A4016E-1F6C-134D-AA39-B51CEAB73B81}"/>
               </a:ext>
             </a:extLst>
           </p:cNvPr>
@@ -696,7 +696,7 @@
           <p:cNvPr id="6" name="Slide Number Placeholder 5">
             <a:extLst>
               <a:ext uri="{FF2B5EF4-FFF2-40B4-BE49-F238E27FC236}">
-                <a16:creationId xmlns:a16="http://schemas.microsoft.com/office/drawing/2014/main" id="{8723299B-C849-1CB4-2897-497C2FCD07FC}"/>
+                <a16:creationId xmlns:a16="http://schemas.microsoft.com/office/drawing/2014/main" id="{C0BA0EE5-2223-1D70-E81A-4FCE377B57F1}"/>
               </a:ext>
             </a:extLst>
           </p:cNvPr>
@@ -712,7 +712,7 @@
           <a:bodyPr/>
           <a:lstStyle/>
           <a:p>
-            <a:fld id="{89220CC8-2F38-4218-9C39-EDF876764042}" type="slidenum">
+            <a:fld id="{FCD4687A-586F-4373-9B75-44E1B3037E08}" type="slidenum">
               <a:rPr lang="en-US" smtClean="0"/>
               <a:t>‹#›</a:t>
             </a:fld>
@@ -723,7 +723,7 @@
     </p:spTree>
     <p:extLst>
       <p:ext uri="{BB962C8B-B14F-4D97-AF65-F5344CB8AC3E}">
-        <p14:creationId xmlns:p14="http://schemas.microsoft.com/office/powerpoint/2010/main" val="3210234572"/>
+        <p14:creationId xmlns:p14="http://schemas.microsoft.com/office/powerpoint/2010/main" val="1596956205"/>
       </p:ext>
     </p:extLst>
   </p:cSld>
@@ -755,7 +755,7 @@
           <p:cNvPr id="2" name="Title 1">
             <a:extLst>
               <a:ext uri="{FF2B5EF4-FFF2-40B4-BE49-F238E27FC236}">
-                <a16:creationId xmlns:a16="http://schemas.microsoft.com/office/drawing/2014/main" id="{783A99FD-FC6E-0F9B-D636-622F256E2070}"/>
+                <a16:creationId xmlns:a16="http://schemas.microsoft.com/office/drawing/2014/main" id="{EBA77FF8-032D-2A75-E170-110FC49EDEF9}"/>
               </a:ext>
             </a:extLst>
           </p:cNvPr>
@@ -783,7 +783,7 @@
           <p:cNvPr id="3" name="Content Placeholder 2">
             <a:extLst>
               <a:ext uri="{FF2B5EF4-FFF2-40B4-BE49-F238E27FC236}">
-                <a16:creationId xmlns:a16="http://schemas.microsoft.com/office/drawing/2014/main" id="{8DB39C2D-2132-C063-747F-56F30C310B75}"/>
+                <a16:creationId xmlns:a16="http://schemas.microsoft.com/office/drawing/2014/main" id="{7871D1D6-4976-217E-B880-6F155F336ACA}"/>
               </a:ext>
             </a:extLst>
           </p:cNvPr>
@@ -840,7 +840,7 @@
           <p:cNvPr id="4" name="Date Placeholder 3">
             <a:extLst>
               <a:ext uri="{FF2B5EF4-FFF2-40B4-BE49-F238E27FC236}">
-                <a16:creationId xmlns:a16="http://schemas.microsoft.com/office/drawing/2014/main" id="{56B7DEA9-4920-DEE8-1137-1CCBF1263BE0}"/>
+                <a16:creationId xmlns:a16="http://schemas.microsoft.com/office/drawing/2014/main" id="{E4E80DD4-7691-D0EA-5EB5-0FC748317226}"/>
               </a:ext>
             </a:extLst>
           </p:cNvPr>
@@ -856,9 +856,9 @@
           <a:bodyPr/>
           <a:lstStyle/>
           <a:p>
-            <a:fld id="{4B285AA2-A1C5-41B4-8ADF-267E3E4B1679}" type="datetimeFigureOut">
+            <a:fld id="{F6582FEC-1620-427C-8DE5-C470062BED34}" type="datetimeFigureOut">
               <a:rPr lang="en-US" smtClean="0"/>
-              <a:t>6/25/2026</a:t>
+              <a:t>6/26/2026</a:t>
             </a:fld>
             <a:endParaRPr lang="en-US"/>
           </a:p>
@@ -869,7 +869,7 @@
           <p:cNvPr id="5" name="Footer Placeholder 4">
             <a:extLst>
               <a:ext uri="{FF2B5EF4-FFF2-40B4-BE49-F238E27FC236}">
-                <a16:creationId xmlns:a16="http://schemas.microsoft.com/office/drawing/2014/main" id="{670997B9-E5C1-FB38-4A77-65CF0A526758}"/>
+                <a16:creationId xmlns:a16="http://schemas.microsoft.com/office/drawing/2014/main" id="{E03E25E7-FAB1-5ABE-ABD9-F5BFEC61354B}"/>
               </a:ext>
             </a:extLst>
           </p:cNvPr>
@@ -894,7 +894,7 @@
           <p:cNvPr id="6" name="Slide Number Placeholder 5">
             <a:extLst>
               <a:ext uri="{FF2B5EF4-FFF2-40B4-BE49-F238E27FC236}">
-                <a16:creationId xmlns:a16="http://schemas.microsoft.com/office/drawing/2014/main" id="{8FC53BFE-62AD-6C99-BE6C-2CA190CEE2E1}"/>
+                <a16:creationId xmlns:a16="http://schemas.microsoft.com/office/drawing/2014/main" id="{10506451-6BC8-2259-F7B1-7336CD48F99B}"/>
               </a:ext>
             </a:extLst>
           </p:cNvPr>
@@ -910,7 +910,7 @@
           <a:bodyPr/>
           <a:lstStyle/>
           <a:p>
-            <a:fld id="{89220CC8-2F38-4218-9C39-EDF876764042}" type="slidenum">
+            <a:fld id="{FCD4687A-586F-4373-9B75-44E1B3037E08}" type="slidenum">
               <a:rPr lang="en-US" smtClean="0"/>
               <a:t>‹#›</a:t>
             </a:fld>
@@ -921,7 +921,7 @@
     </p:spTree>
     <p:extLst>
       <p:ext uri="{BB962C8B-B14F-4D97-AF65-F5344CB8AC3E}">
-        <p14:creationId xmlns:p14="http://schemas.microsoft.com/office/powerpoint/2010/main" val="2112510840"/>
+        <p14:creationId xmlns:p14="http://schemas.microsoft.com/office/powerpoint/2010/main" val="710279508"/>
       </p:ext>
     </p:extLst>
   </p:cSld>
@@ -953,7 +953,7 @@
           <p:cNvPr id="2" name="Title 1">
             <a:extLst>
               <a:ext uri="{FF2B5EF4-FFF2-40B4-BE49-F238E27FC236}">
-                <a16:creationId xmlns:a16="http://schemas.microsoft.com/office/drawing/2014/main" id="{D0E09A18-5E68-6DB0-612B-E7F0CC00D3BF}"/>
+                <a16:creationId xmlns:a16="http://schemas.microsoft.com/office/drawing/2014/main" id="{0DA6BCCC-D035-3021-175A-1A11A000D7EB}"/>
               </a:ext>
             </a:extLst>
           </p:cNvPr>
@@ -990,7 +990,7 @@
           <p:cNvPr id="3" name="Text Placeholder 2">
             <a:extLst>
               <a:ext uri="{FF2B5EF4-FFF2-40B4-BE49-F238E27FC236}">
-                <a16:creationId xmlns:a16="http://schemas.microsoft.com/office/drawing/2014/main" id="{0EB5742B-031D-005F-D980-47A24D6D804B}"/>
+                <a16:creationId xmlns:a16="http://schemas.microsoft.com/office/drawing/2014/main" id="{115B5D38-B1C7-E418-1CF6-A69BC9E9A712}"/>
               </a:ext>
             </a:extLst>
           </p:cNvPr>
@@ -1115,7 +1115,7 @@
           <p:cNvPr id="4" name="Date Placeholder 3">
             <a:extLst>
               <a:ext uri="{FF2B5EF4-FFF2-40B4-BE49-F238E27FC236}">
-                <a16:creationId xmlns:a16="http://schemas.microsoft.com/office/drawing/2014/main" id="{5E848A55-40D6-8AEB-B669-4A3B46CF6920}"/>
+                <a16:creationId xmlns:a16="http://schemas.microsoft.com/office/drawing/2014/main" id="{953E49F1-6CC8-9004-DC92-212D7186383F}"/>
               </a:ext>
             </a:extLst>
           </p:cNvPr>
@@ -1131,9 +1131,9 @@
           <a:bodyPr/>
           <a:lstStyle/>
           <a:p>
-            <a:fld id="{4B285AA2-A1C5-41B4-8ADF-267E3E4B1679}" type="datetimeFigureOut">
+            <a:fld id="{F6582FEC-1620-427C-8DE5-C470062BED34}" type="datetimeFigureOut">
               <a:rPr lang="en-US" smtClean="0"/>
-              <a:t>6/25/2026</a:t>
+              <a:t>6/26/2026</a:t>
             </a:fld>
             <a:endParaRPr lang="en-US"/>
           </a:p>
@@ -1144,7 +1144,7 @@
           <p:cNvPr id="5" name="Footer Placeholder 4">
             <a:extLst>
               <a:ext uri="{FF2B5EF4-FFF2-40B4-BE49-F238E27FC236}">
-                <a16:creationId xmlns:a16="http://schemas.microsoft.com/office/drawing/2014/main" id="{1F8F8547-2D07-93D7-2605-7FB314E3B78A}"/>
+                <a16:creationId xmlns:a16="http://schemas.microsoft.com/office/drawing/2014/main" id="{4CDE95BB-E282-0EA5-D6E4-1CC0B2AF3749}"/>
               </a:ext>
             </a:extLst>
           </p:cNvPr>
@@ -1169,7 +1169,7 @@
           <p:cNvPr id="6" name="Slide Number Placeholder 5">
             <a:extLst>
               <a:ext uri="{FF2B5EF4-FFF2-40B4-BE49-F238E27FC236}">
-                <a16:creationId xmlns:a16="http://schemas.microsoft.com/office/drawing/2014/main" id="{DD9BB36E-42B3-B205-1886-B4695C46DA11}"/>
+                <a16:creationId xmlns:a16="http://schemas.microsoft.com/office/drawing/2014/main" id="{2ACB2DD5-6FF1-3B9B-D078-B791EFC968C0}"/>
               </a:ext>
             </a:extLst>
           </p:cNvPr>
@@ -1185,7 +1185,7 @@
           <a:bodyPr/>
           <a:lstStyle/>
           <a:p>
-            <a:fld id="{89220CC8-2F38-4218-9C39-EDF876764042}" type="slidenum">
+            <a:fld id="{FCD4687A-586F-4373-9B75-44E1B3037E08}" type="slidenum">
               <a:rPr lang="en-US" smtClean="0"/>
               <a:t>‹#›</a:t>
             </a:fld>
@@ -1196,7 +1196,7 @@
     </p:spTree>
     <p:extLst>
       <p:ext uri="{BB962C8B-B14F-4D97-AF65-F5344CB8AC3E}">
-        <p14:creationId xmlns:p14="http://schemas.microsoft.com/office/powerpoint/2010/main" val="111207784"/>
+        <p14:creationId xmlns:p14="http://schemas.microsoft.com/office/powerpoint/2010/main" val="2620652167"/>
       </p:ext>
     </p:extLst>
   </p:cSld>
@@ -1228,7 +1228,7 @@
           <p:cNvPr id="2" name="Title 1">
             <a:extLst>
               <a:ext uri="{FF2B5EF4-FFF2-40B4-BE49-F238E27FC236}">
-                <a16:creationId xmlns:a16="http://schemas.microsoft.com/office/drawing/2014/main" id="{5597C078-E9AB-A2FA-3F89-9D9E561BA8A3}"/>
+                <a16:creationId xmlns:a16="http://schemas.microsoft.com/office/drawing/2014/main" id="{6AAC3362-4E7F-AC5E-FEF7-6901768CDC93}"/>
               </a:ext>
             </a:extLst>
           </p:cNvPr>
@@ -1256,7 +1256,7 @@
           <p:cNvPr id="3" name="Content Placeholder 2">
             <a:extLst>
               <a:ext uri="{FF2B5EF4-FFF2-40B4-BE49-F238E27FC236}">
-                <a16:creationId xmlns:a16="http://schemas.microsoft.com/office/drawing/2014/main" id="{57075D5D-94B1-E244-45CC-1B9A4DC8B375}"/>
+                <a16:creationId xmlns:a16="http://schemas.microsoft.com/office/drawing/2014/main" id="{BA4CA5E9-913A-383F-5467-9E654184B34C}"/>
               </a:ext>
             </a:extLst>
           </p:cNvPr>
@@ -1318,7 +1318,7 @@
           <p:cNvPr id="4" name="Content Placeholder 3">
             <a:extLst>
               <a:ext uri="{FF2B5EF4-FFF2-40B4-BE49-F238E27FC236}">
-                <a16:creationId xmlns:a16="http://schemas.microsoft.com/office/drawing/2014/main" id="{4C420CE8-EC7B-F18F-C7F2-6F00FFDD5D1D}"/>
+                <a16:creationId xmlns:a16="http://schemas.microsoft.com/office/drawing/2014/main" id="{84ACCB14-DEBB-209B-BE34-CC3BD0FC49D1}"/>
               </a:ext>
             </a:extLst>
           </p:cNvPr>
@@ -1380,7 +1380,7 @@
           <p:cNvPr id="5" name="Date Placeholder 4">
             <a:extLst>
               <a:ext uri="{FF2B5EF4-FFF2-40B4-BE49-F238E27FC236}">
-                <a16:creationId xmlns:a16="http://schemas.microsoft.com/office/drawing/2014/main" id="{40C81661-171B-A279-3682-C6544CF2E702}"/>
+                <a16:creationId xmlns:a16="http://schemas.microsoft.com/office/drawing/2014/main" id="{E92A1A0D-E6C0-44BD-2C44-0129EF2542E8}"/>
               </a:ext>
             </a:extLst>
           </p:cNvPr>
@@ -1396,9 +1396,9 @@
           <a:bodyPr/>
           <a:lstStyle/>
           <a:p>
-            <a:fld id="{4B285AA2-A1C5-41B4-8ADF-267E3E4B1679}" type="datetimeFigureOut">
+            <a:fld id="{F6582FEC-1620-427C-8DE5-C470062BED34}" type="datetimeFigureOut">
               <a:rPr lang="en-US" smtClean="0"/>
-              <a:t>6/25/2026</a:t>
+              <a:t>6/26/2026</a:t>
             </a:fld>
             <a:endParaRPr lang="en-US"/>
           </a:p>
@@ -1409,7 +1409,7 @@
           <p:cNvPr id="6" name="Footer Placeholder 5">
             <a:extLst>
               <a:ext uri="{FF2B5EF4-FFF2-40B4-BE49-F238E27FC236}">
-                <a16:creationId xmlns:a16="http://schemas.microsoft.com/office/drawing/2014/main" id="{181425C3-5303-8296-6A8D-6CB3E8792CFC}"/>
+                <a16:creationId xmlns:a16="http://schemas.microsoft.com/office/drawing/2014/main" id="{D7230459-1717-B8E3-F3E7-BE04E8AFD876}"/>
               </a:ext>
             </a:extLst>
           </p:cNvPr>
@@ -1434,7 +1434,7 @@
           <p:cNvPr id="7" name="Slide Number Placeholder 6">
             <a:extLst>
               <a:ext uri="{FF2B5EF4-FFF2-40B4-BE49-F238E27FC236}">
-                <a16:creationId xmlns:a16="http://schemas.microsoft.com/office/drawing/2014/main" id="{C20A5B86-F089-D1F4-04FB-285FC706F756}"/>
+                <a16:creationId xmlns:a16="http://schemas.microsoft.com/office/drawing/2014/main" id="{B779AA67-D873-D21D-B56D-78B081220C78}"/>
               </a:ext>
             </a:extLst>
           </p:cNvPr>
@@ -1450,7 +1450,7 @@
           <a:bodyPr/>
           <a:lstStyle/>
           <a:p>
-            <a:fld id="{89220CC8-2F38-4218-9C39-EDF876764042}" type="slidenum">
+            <a:fld id="{FCD4687A-586F-4373-9B75-44E1B3037E08}" type="slidenum">
               <a:rPr lang="en-US" smtClean="0"/>
               <a:t>‹#›</a:t>
             </a:fld>
@@ -1461,7 +1461,7 @@
     </p:spTree>
     <p:extLst>
       <p:ext uri="{BB962C8B-B14F-4D97-AF65-F5344CB8AC3E}">
-        <p14:creationId xmlns:p14="http://schemas.microsoft.com/office/powerpoint/2010/main" val="438559290"/>
+        <p14:creationId xmlns:p14="http://schemas.microsoft.com/office/powerpoint/2010/main" val="3748347974"/>
       </p:ext>
     </p:extLst>
   </p:cSld>
@@ -1493,7 +1493,7 @@
           <p:cNvPr id="2" name="Title 1">
             <a:extLst>
               <a:ext uri="{FF2B5EF4-FFF2-40B4-BE49-F238E27FC236}">
-                <a16:creationId xmlns:a16="http://schemas.microsoft.com/office/drawing/2014/main" id="{C4E9B9F5-2F57-FAAA-4029-8DB60019BEFC}"/>
+                <a16:creationId xmlns:a16="http://schemas.microsoft.com/office/drawing/2014/main" id="{A14839EB-3EAC-758C-189C-8528C58DC607}"/>
               </a:ext>
             </a:extLst>
           </p:cNvPr>
@@ -1526,7 +1526,7 @@
           <p:cNvPr id="3" name="Text Placeholder 2">
             <a:extLst>
               <a:ext uri="{FF2B5EF4-FFF2-40B4-BE49-F238E27FC236}">
-                <a16:creationId xmlns:a16="http://schemas.microsoft.com/office/drawing/2014/main" id="{50B434E2-3635-369C-C26F-DFBF839C4E26}"/>
+                <a16:creationId xmlns:a16="http://schemas.microsoft.com/office/drawing/2014/main" id="{83CBC6E8-0A80-AA71-CC8F-92D1478ECF48}"/>
               </a:ext>
             </a:extLst>
           </p:cNvPr>
@@ -1597,7 +1597,7 @@
           <p:cNvPr id="4" name="Content Placeholder 3">
             <a:extLst>
               <a:ext uri="{FF2B5EF4-FFF2-40B4-BE49-F238E27FC236}">
-                <a16:creationId xmlns:a16="http://schemas.microsoft.com/office/drawing/2014/main" id="{A49A6DBC-6FFB-55C1-41E6-2E60E7B4A689}"/>
+                <a16:creationId xmlns:a16="http://schemas.microsoft.com/office/drawing/2014/main" id="{DC00A32E-45D2-6A37-02AC-4786F9E435B9}"/>
               </a:ext>
             </a:extLst>
           </p:cNvPr>
@@ -1659,7 +1659,7 @@
           <p:cNvPr id="5" name="Text Placeholder 4">
             <a:extLst>
               <a:ext uri="{FF2B5EF4-FFF2-40B4-BE49-F238E27FC236}">
-                <a16:creationId xmlns:a16="http://schemas.microsoft.com/office/drawing/2014/main" id="{E7F5A78D-952F-C768-4DBC-6C5BEA17957B}"/>
+                <a16:creationId xmlns:a16="http://schemas.microsoft.com/office/drawing/2014/main" id="{E8DA6614-FD86-526E-3753-CED67EAEBE25}"/>
               </a:ext>
             </a:extLst>
           </p:cNvPr>
@@ -1730,7 +1730,7 @@
           <p:cNvPr id="6" name="Content Placeholder 5">
             <a:extLst>
               <a:ext uri="{FF2B5EF4-FFF2-40B4-BE49-F238E27FC236}">
-                <a16:creationId xmlns:a16="http://schemas.microsoft.com/office/drawing/2014/main" id="{D16DA88A-45D0-E816-419B-FADF03613B4C}"/>
+                <a16:creationId xmlns:a16="http://schemas.microsoft.com/office/drawing/2014/main" id="{347F236D-159C-71B0-A284-79D72105E6B3}"/>
               </a:ext>
             </a:extLst>
           </p:cNvPr>
@@ -1792,7 +1792,7 @@
           <p:cNvPr id="7" name="Date Placeholder 6">
             <a:extLst>
               <a:ext uri="{FF2B5EF4-FFF2-40B4-BE49-F238E27FC236}">
-                <a16:creationId xmlns:a16="http://schemas.microsoft.com/office/drawing/2014/main" id="{B468AB12-FE72-7B7A-66AE-C9FF9D1E225A}"/>
+                <a16:creationId xmlns:a16="http://schemas.microsoft.com/office/drawing/2014/main" id="{12F024BE-F2FE-6F94-68F7-D9A724CF9022}"/>
               </a:ext>
             </a:extLst>
           </p:cNvPr>
@@ -1808,9 +1808,9 @@
           <a:bodyPr/>
           <a:lstStyle/>
           <a:p>
-            <a:fld id="{4B285AA2-A1C5-41B4-8ADF-267E3E4B1679}" type="datetimeFigureOut">
+            <a:fld id="{F6582FEC-1620-427C-8DE5-C470062BED34}" type="datetimeFigureOut">
               <a:rPr lang="en-US" smtClean="0"/>
-              <a:t>6/25/2026</a:t>
+              <a:t>6/26/2026</a:t>
             </a:fld>
             <a:endParaRPr lang="en-US"/>
           </a:p>
@@ -1821,7 +1821,7 @@
           <p:cNvPr id="8" name="Footer Placeholder 7">
             <a:extLst>
               <a:ext uri="{FF2B5EF4-FFF2-40B4-BE49-F238E27FC236}">
-                <a16:creationId xmlns:a16="http://schemas.microsoft.com/office/drawing/2014/main" id="{ABE0CBBF-1750-8887-4069-1C828564BF10}"/>
+                <a16:creationId xmlns:a16="http://schemas.microsoft.com/office/drawing/2014/main" id="{FB4A05B9-8437-3031-CA2A-6790FB775FB7}"/>
               </a:ext>
             </a:extLst>
           </p:cNvPr>
@@ -1846,7 +1846,7 @@
           <p:cNvPr id="9" name="Slide Number Placeholder 8">
             <a:extLst>
               <a:ext uri="{FF2B5EF4-FFF2-40B4-BE49-F238E27FC236}">
-                <a16:creationId xmlns:a16="http://schemas.microsoft.com/office/drawing/2014/main" id="{052CB143-B3DD-61BB-4B19-A2F6BA3B6916}"/>
+                <a16:creationId xmlns:a16="http://schemas.microsoft.com/office/drawing/2014/main" id="{78E1AC87-B782-3148-2208-D1803BC006DE}"/>
               </a:ext>
             </a:extLst>
           </p:cNvPr>
@@ -1862,7 +1862,7 @@
           <a:bodyPr/>
           <a:lstStyle/>
           <a:p>
-            <a:fld id="{89220CC8-2F38-4218-9C39-EDF876764042}" type="slidenum">
+            <a:fld id="{FCD4687A-586F-4373-9B75-44E1B3037E08}" type="slidenum">
               <a:rPr lang="en-US" smtClean="0"/>
               <a:t>‹#›</a:t>
             </a:fld>
@@ -1873,7 +1873,7 @@
     </p:spTree>
     <p:extLst>
       <p:ext uri="{BB962C8B-B14F-4D97-AF65-F5344CB8AC3E}">
-        <p14:creationId xmlns:p14="http://schemas.microsoft.com/office/powerpoint/2010/main" val="3320853365"/>
+        <p14:creationId xmlns:p14="http://schemas.microsoft.com/office/powerpoint/2010/main" val="4184920565"/>
       </p:ext>
     </p:extLst>
   </p:cSld>
@@ -1905,7 +1905,7 @@
           <p:cNvPr id="2" name="Title 1">
             <a:extLst>
               <a:ext uri="{FF2B5EF4-FFF2-40B4-BE49-F238E27FC236}">
-                <a16:creationId xmlns:a16="http://schemas.microsoft.com/office/drawing/2014/main" id="{672381AD-2D09-A2C1-667B-52B972DFD0C1}"/>
+                <a16:creationId xmlns:a16="http://schemas.microsoft.com/office/drawing/2014/main" id="{9B725EEA-814A-6B51-5C1C-18F82F02B188}"/>
               </a:ext>
             </a:extLst>
           </p:cNvPr>
@@ -1933,7 +1933,7 @@
           <p:cNvPr id="3" name="Date Placeholder 2">
             <a:extLst>
               <a:ext uri="{FF2B5EF4-FFF2-40B4-BE49-F238E27FC236}">
-                <a16:creationId xmlns:a16="http://schemas.microsoft.com/office/drawing/2014/main" id="{4895B4AC-0BF1-9C64-FAF4-0BC5567BABAC}"/>
+                <a16:creationId xmlns:a16="http://schemas.microsoft.com/office/drawing/2014/main" id="{10A7C319-E16A-0A94-AF07-1FAE20D69091}"/>
               </a:ext>
             </a:extLst>
           </p:cNvPr>
@@ -1949,9 +1949,9 @@
           <a:bodyPr/>
           <a:lstStyle/>
           <a:p>
-            <a:fld id="{4B285AA2-A1C5-41B4-8ADF-267E3E4B1679}" type="datetimeFigureOut">
+            <a:fld id="{F6582FEC-1620-427C-8DE5-C470062BED34}" type="datetimeFigureOut">
               <a:rPr lang="en-US" smtClean="0"/>
-              <a:t>6/25/2026</a:t>
+              <a:t>6/26/2026</a:t>
             </a:fld>
             <a:endParaRPr lang="en-US"/>
           </a:p>
@@ -1962,7 +1962,7 @@
           <p:cNvPr id="4" name="Footer Placeholder 3">
             <a:extLst>
               <a:ext uri="{FF2B5EF4-FFF2-40B4-BE49-F238E27FC236}">
-                <a16:creationId xmlns:a16="http://schemas.microsoft.com/office/drawing/2014/main" id="{26584974-48D1-02F1-0A95-7080EAFC5933}"/>
+                <a16:creationId xmlns:a16="http://schemas.microsoft.com/office/drawing/2014/main" id="{2437D5DF-8C00-E4C0-6745-4F4780580F0B}"/>
               </a:ext>
             </a:extLst>
           </p:cNvPr>
@@ -1987,7 +1987,7 @@
           <p:cNvPr id="5" name="Slide Number Placeholder 4">
             <a:extLst>
               <a:ext uri="{FF2B5EF4-FFF2-40B4-BE49-F238E27FC236}">
-                <a16:creationId xmlns:a16="http://schemas.microsoft.com/office/drawing/2014/main" id="{A66203E2-E9DE-05ED-E82F-8C017789FE2A}"/>
+                <a16:creationId xmlns:a16="http://schemas.microsoft.com/office/drawing/2014/main" id="{73B57936-67BA-F4C1-AC6B-FE39D4BF4F78}"/>
               </a:ext>
             </a:extLst>
           </p:cNvPr>
@@ -2003,7 +2003,7 @@
           <a:bodyPr/>
           <a:lstStyle/>
           <a:p>
-            <a:fld id="{89220CC8-2F38-4218-9C39-EDF876764042}" type="slidenum">
+            <a:fld id="{FCD4687A-586F-4373-9B75-44E1B3037E08}" type="slidenum">
               <a:rPr lang="en-US" smtClean="0"/>
               <a:t>‹#›</a:t>
             </a:fld>
@@ -2014,7 +2014,7 @@
     </p:spTree>
     <p:extLst>
       <p:ext uri="{BB962C8B-B14F-4D97-AF65-F5344CB8AC3E}">
-        <p14:creationId xmlns:p14="http://schemas.microsoft.com/office/powerpoint/2010/main" val="909282292"/>
+        <p14:creationId xmlns:p14="http://schemas.microsoft.com/office/powerpoint/2010/main" val="357121605"/>
       </p:ext>
     </p:extLst>
   </p:cSld>
@@ -2046,7 +2046,7 @@
           <p:cNvPr id="2" name="Date Placeholder 1">
             <a:extLst>
               <a:ext uri="{FF2B5EF4-FFF2-40B4-BE49-F238E27FC236}">
-                <a16:creationId xmlns:a16="http://schemas.microsoft.com/office/drawing/2014/main" id="{16D0A48C-CC22-8F13-362E-AFA0926E3C0A}"/>
+                <a16:creationId xmlns:a16="http://schemas.microsoft.com/office/drawing/2014/main" id="{05DBAAEB-E18A-8B64-3550-E5937916128D}"/>
               </a:ext>
             </a:extLst>
           </p:cNvPr>
@@ -2062,9 +2062,9 @@
           <a:bodyPr/>
           <a:lstStyle/>
           <a:p>
-            <a:fld id="{4B285AA2-A1C5-41B4-8ADF-267E3E4B1679}" type="datetimeFigureOut">
+            <a:fld id="{F6582FEC-1620-427C-8DE5-C470062BED34}" type="datetimeFigureOut">
               <a:rPr lang="en-US" smtClean="0"/>
-              <a:t>6/25/2026</a:t>
+              <a:t>6/26/2026</a:t>
             </a:fld>
             <a:endParaRPr lang="en-US"/>
           </a:p>
@@ -2075,7 +2075,7 @@
           <p:cNvPr id="3" name="Footer Placeholder 2">
             <a:extLst>
               <a:ext uri="{FF2B5EF4-FFF2-40B4-BE49-F238E27FC236}">
-                <a16:creationId xmlns:a16="http://schemas.microsoft.com/office/drawing/2014/main" id="{6672F4AD-3BF8-8743-D256-5A9A101A5BF6}"/>
+                <a16:creationId xmlns:a16="http://schemas.microsoft.com/office/drawing/2014/main" id="{F542B057-9A20-0CC4-8AE7-DB9F85E36A82}"/>
               </a:ext>
             </a:extLst>
           </p:cNvPr>
@@ -2100,7 +2100,7 @@
           <p:cNvPr id="4" name="Slide Number Placeholder 3">
             <a:extLst>
               <a:ext uri="{FF2B5EF4-FFF2-40B4-BE49-F238E27FC236}">
-                <a16:creationId xmlns:a16="http://schemas.microsoft.com/office/drawing/2014/main" id="{310498F1-337D-3606-D618-B78EB699EFD6}"/>
+                <a16:creationId xmlns:a16="http://schemas.microsoft.com/office/drawing/2014/main" id="{F2684156-2013-A8C7-9C5E-BA93C174BE4B}"/>
               </a:ext>
             </a:extLst>
           </p:cNvPr>
@@ -2116,7 +2116,7 @@
           <a:bodyPr/>
           <a:lstStyle/>
           <a:p>
-            <a:fld id="{89220CC8-2F38-4218-9C39-EDF876764042}" type="slidenum">
+            <a:fld id="{FCD4687A-586F-4373-9B75-44E1B3037E08}" type="slidenum">
               <a:rPr lang="en-US" smtClean="0"/>
               <a:t>‹#›</a:t>
             </a:fld>
@@ -2127,7 +2127,7 @@
     </p:spTree>
     <p:extLst>
       <p:ext uri="{BB962C8B-B14F-4D97-AF65-F5344CB8AC3E}">
-        <p14:creationId xmlns:p14="http://schemas.microsoft.com/office/powerpoint/2010/main" val="156926323"/>
+        <p14:creationId xmlns:p14="http://schemas.microsoft.com/office/powerpoint/2010/main" val="2469665430"/>
       </p:ext>
     </p:extLst>
   </p:cSld>
@@ -2159,7 +2159,7 @@
           <p:cNvPr id="2" name="Title 1">
             <a:extLst>
               <a:ext uri="{FF2B5EF4-FFF2-40B4-BE49-F238E27FC236}">
-                <a16:creationId xmlns:a16="http://schemas.microsoft.com/office/drawing/2014/main" id="{1EEB0F46-FC5D-C240-E5B5-5E132A3DD512}"/>
+                <a16:creationId xmlns:a16="http://schemas.microsoft.com/office/drawing/2014/main" id="{698AC8B2-1510-B518-52A6-C73EC423E6CF}"/>
               </a:ext>
             </a:extLst>
           </p:cNvPr>
@@ -2196,7 +2196,7 @@
           <p:cNvPr id="3" name="Content Placeholder 2">
             <a:extLst>
               <a:ext uri="{FF2B5EF4-FFF2-40B4-BE49-F238E27FC236}">
-                <a16:creationId xmlns:a16="http://schemas.microsoft.com/office/drawing/2014/main" id="{1E1F0BB6-E56F-F39E-AB6E-7AC08009CDD8}"/>
+                <a16:creationId xmlns:a16="http://schemas.microsoft.com/office/drawing/2014/main" id="{1A9F3172-85D5-930E-BD92-2E56A61C08CC}"/>
               </a:ext>
             </a:extLst>
           </p:cNvPr>
@@ -2286,7 +2286,7 @@
           <p:cNvPr id="4" name="Text Placeholder 3">
             <a:extLst>
               <a:ext uri="{FF2B5EF4-FFF2-40B4-BE49-F238E27FC236}">
-                <a16:creationId xmlns:a16="http://schemas.microsoft.com/office/drawing/2014/main" id="{C9061B8A-5531-C47C-FC82-EF8781AEF5F8}"/>
+                <a16:creationId xmlns:a16="http://schemas.microsoft.com/office/drawing/2014/main" id="{FC932D63-39EA-2047-5670-BFE64A72EA07}"/>
               </a:ext>
             </a:extLst>
           </p:cNvPr>
@@ -2357,7 +2357,7 @@
           <p:cNvPr id="5" name="Date Placeholder 4">
             <a:extLst>
               <a:ext uri="{FF2B5EF4-FFF2-40B4-BE49-F238E27FC236}">
-                <a16:creationId xmlns:a16="http://schemas.microsoft.com/office/drawing/2014/main" id="{6468C055-CC7E-963F-04F4-2CE602095FF7}"/>
+                <a16:creationId xmlns:a16="http://schemas.microsoft.com/office/drawing/2014/main" id="{63991B6D-B180-084D-CBE6-26CCA85DF36C}"/>
               </a:ext>
             </a:extLst>
           </p:cNvPr>
@@ -2373,9 +2373,9 @@
           <a:bodyPr/>
           <a:lstStyle/>
           <a:p>
-            <a:fld id="{4B285AA2-A1C5-41B4-8ADF-267E3E4B1679}" type="datetimeFigureOut">
+            <a:fld id="{F6582FEC-1620-427C-8DE5-C470062BED34}" type="datetimeFigureOut">
               <a:rPr lang="en-US" smtClean="0"/>
-              <a:t>6/25/2026</a:t>
+              <a:t>6/26/2026</a:t>
             </a:fld>
             <a:endParaRPr lang="en-US"/>
           </a:p>
@@ -2386,7 +2386,7 @@
           <p:cNvPr id="6" name="Footer Placeholder 5">
             <a:extLst>
               <a:ext uri="{FF2B5EF4-FFF2-40B4-BE49-F238E27FC236}">
-                <a16:creationId xmlns:a16="http://schemas.microsoft.com/office/drawing/2014/main" id="{B97F6A78-A209-1B40-0EF3-2076C3FB2FBD}"/>
+                <a16:creationId xmlns:a16="http://schemas.microsoft.com/office/drawing/2014/main" id="{77DF1F31-F4D0-EAA0-A7A9-9CB240D568F1}"/>
               </a:ext>
             </a:extLst>
           </p:cNvPr>
@@ -2411,7 +2411,7 @@
           <p:cNvPr id="7" name="Slide Number Placeholder 6">
             <a:extLst>
               <a:ext uri="{FF2B5EF4-FFF2-40B4-BE49-F238E27FC236}">
-                <a16:creationId xmlns:a16="http://schemas.microsoft.com/office/drawing/2014/main" id="{F0DB90E6-CD90-2FC6-8401-2478AD81DD14}"/>
+                <a16:creationId xmlns:a16="http://schemas.microsoft.com/office/drawing/2014/main" id="{DB204401-60D2-749B-0134-9FD41985F3F3}"/>
               </a:ext>
             </a:extLst>
           </p:cNvPr>
@@ -2427,7 +2427,7 @@
           <a:bodyPr/>
           <a:lstStyle/>
           <a:p>
-            <a:fld id="{89220CC8-2F38-4218-9C39-EDF876764042}" type="slidenum">
+            <a:fld id="{FCD4687A-586F-4373-9B75-44E1B3037E08}" type="slidenum">
               <a:rPr lang="en-US" smtClean="0"/>
               <a:t>‹#›</a:t>
             </a:fld>
@@ -2438,7 +2438,7 @@
     </p:spTree>
     <p:extLst>
       <p:ext uri="{BB962C8B-B14F-4D97-AF65-F5344CB8AC3E}">
-        <p14:creationId xmlns:p14="http://schemas.microsoft.com/office/powerpoint/2010/main" val="2173247720"/>
+        <p14:creationId xmlns:p14="http://schemas.microsoft.com/office/powerpoint/2010/main" val="1809686147"/>
       </p:ext>
     </p:extLst>
   </p:cSld>
@@ -2470,7 +2470,7 @@
           <p:cNvPr id="2" name="Title 1">
             <a:extLst>
               <a:ext uri="{FF2B5EF4-FFF2-40B4-BE49-F238E27FC236}">
-                <a16:creationId xmlns:a16="http://schemas.microsoft.com/office/drawing/2014/main" id="{38490EC8-DC29-AA73-EB35-637310434CC7}"/>
+                <a16:creationId xmlns:a16="http://schemas.microsoft.com/office/drawing/2014/main" id="{7F34428F-1077-1C13-51D9-AB8FB9E1C372}"/>
               </a:ext>
             </a:extLst>
           </p:cNvPr>
@@ -2507,7 +2507,7 @@
           <p:cNvPr id="3" name="Picture Placeholder 2">
             <a:extLst>
               <a:ext uri="{FF2B5EF4-FFF2-40B4-BE49-F238E27FC236}">
-                <a16:creationId xmlns:a16="http://schemas.microsoft.com/office/drawing/2014/main" id="{851D06E3-2F05-D56E-03D9-BE2E05E5920D}"/>
+                <a16:creationId xmlns:a16="http://schemas.microsoft.com/office/drawing/2014/main" id="{881E5119-DA65-CE51-6674-D4E6F2F20657}"/>
               </a:ext>
             </a:extLst>
           </p:cNvPr>
@@ -2574,7 +2574,7 @@
           <p:cNvPr id="4" name="Text Placeholder 3">
             <a:extLst>
               <a:ext uri="{FF2B5EF4-FFF2-40B4-BE49-F238E27FC236}">
-                <a16:creationId xmlns:a16="http://schemas.microsoft.com/office/drawing/2014/main" id="{AFBE4C63-0376-6929-1C58-3012CFD8992D}"/>
+                <a16:creationId xmlns:a16="http://schemas.microsoft.com/office/drawing/2014/main" id="{66719162-16E6-90E3-16D6-90010D55F962}"/>
               </a:ext>
             </a:extLst>
           </p:cNvPr>
@@ -2645,7 +2645,7 @@
           <p:cNvPr id="5" name="Date Placeholder 4">
             <a:extLst>
               <a:ext uri="{FF2B5EF4-FFF2-40B4-BE49-F238E27FC236}">
-                <a16:creationId xmlns:a16="http://schemas.microsoft.com/office/drawing/2014/main" id="{12EA35AC-F97A-A400-5E13-D0C05D5F2054}"/>
+                <a16:creationId xmlns:a16="http://schemas.microsoft.com/office/drawing/2014/main" id="{B2A788F9-7F9C-6742-BEFB-9831E0E05400}"/>
               </a:ext>
             </a:extLst>
           </p:cNvPr>
@@ -2661,9 +2661,9 @@
           <a:bodyPr/>
           <a:lstStyle/>
           <a:p>
-            <a:fld id="{4B285AA2-A1C5-41B4-8ADF-267E3E4B1679}" type="datetimeFigureOut">
+            <a:fld id="{F6582FEC-1620-427C-8DE5-C470062BED34}" type="datetimeFigureOut">
               <a:rPr lang="en-US" smtClean="0"/>
-              <a:t>6/25/2026</a:t>
+              <a:t>6/26/2026</a:t>
             </a:fld>
             <a:endParaRPr lang="en-US"/>
           </a:p>
@@ -2674,7 +2674,7 @@
           <p:cNvPr id="6" name="Footer Placeholder 5">
             <a:extLst>
               <a:ext uri="{FF2B5EF4-FFF2-40B4-BE49-F238E27FC236}">
-                <a16:creationId xmlns:a16="http://schemas.microsoft.com/office/drawing/2014/main" id="{400ACAE1-81F9-8CAD-1C5F-59B59848D907}"/>
+                <a16:creationId xmlns:a16="http://schemas.microsoft.com/office/drawing/2014/main" id="{D8E4039E-56D7-6699-9185-00F6407792DB}"/>
               </a:ext>
             </a:extLst>
           </p:cNvPr>
@@ -2699,7 +2699,7 @@
           <p:cNvPr id="7" name="Slide Number Placeholder 6">
             <a:extLst>
               <a:ext uri="{FF2B5EF4-FFF2-40B4-BE49-F238E27FC236}">
-                <a16:creationId xmlns:a16="http://schemas.microsoft.com/office/drawing/2014/main" id="{3142790D-A1A4-20DD-8E43-4BE0595045BC}"/>
+                <a16:creationId xmlns:a16="http://schemas.microsoft.com/office/drawing/2014/main" id="{278A7651-3EF0-5AB5-BBCA-D62D163509A0}"/>
               </a:ext>
             </a:extLst>
           </p:cNvPr>
@@ -2715,7 +2715,7 @@
           <a:bodyPr/>
           <a:lstStyle/>
           <a:p>
-            <a:fld id="{89220CC8-2F38-4218-9C39-EDF876764042}" type="slidenum">
+            <a:fld id="{FCD4687A-586F-4373-9B75-44E1B3037E08}" type="slidenum">
               <a:rPr lang="en-US" smtClean="0"/>
               <a:t>‹#›</a:t>
             </a:fld>
@@ -2726,7 +2726,7 @@
     </p:spTree>
     <p:extLst>
       <p:ext uri="{BB962C8B-B14F-4D97-AF65-F5344CB8AC3E}">
-        <p14:creationId xmlns:p14="http://schemas.microsoft.com/office/powerpoint/2010/main" val="243120986"/>
+        <p14:creationId xmlns:p14="http://schemas.microsoft.com/office/powerpoint/2010/main" val="1120192369"/>
       </p:ext>
     </p:extLst>
   </p:cSld>
@@ -2763,7 +2763,7 @@
           <p:cNvPr id="2" name="Title Placeholder 1">
             <a:extLst>
               <a:ext uri="{FF2B5EF4-FFF2-40B4-BE49-F238E27FC236}">
-                <a16:creationId xmlns:a16="http://schemas.microsoft.com/office/drawing/2014/main" id="{1BC91327-6365-1B29-F76B-3C282E9B9502}"/>
+                <a16:creationId xmlns:a16="http://schemas.microsoft.com/office/drawing/2014/main" id="{9BCCC850-F4F2-CFA2-7A88-BD7D84F38E0C}"/>
               </a:ext>
             </a:extLst>
           </p:cNvPr>
@@ -2801,7 +2801,7 @@
           <p:cNvPr id="3" name="Text Placeholder 2">
             <a:extLst>
               <a:ext uri="{FF2B5EF4-FFF2-40B4-BE49-F238E27FC236}">
-                <a16:creationId xmlns:a16="http://schemas.microsoft.com/office/drawing/2014/main" id="{367A9037-A8E0-A8D8-F173-A0AC5E4666B3}"/>
+                <a16:creationId xmlns:a16="http://schemas.microsoft.com/office/drawing/2014/main" id="{945B77B1-A9F6-F147-5275-CD3D9F05A18D}"/>
               </a:ext>
             </a:extLst>
           </p:cNvPr>
@@ -2868,7 +2868,7 @@
           <p:cNvPr id="4" name="Date Placeholder 3">
             <a:extLst>
               <a:ext uri="{FF2B5EF4-FFF2-40B4-BE49-F238E27FC236}">
-                <a16:creationId xmlns:a16="http://schemas.microsoft.com/office/drawing/2014/main" id="{278DA2A7-053F-F729-ED4C-E7532EEA9A43}"/>
+                <a16:creationId xmlns:a16="http://schemas.microsoft.com/office/drawing/2014/main" id="{835960D5-B181-48E9-5174-2E30234CD0AA}"/>
               </a:ext>
             </a:extLst>
           </p:cNvPr>
@@ -2902,9 +2902,9 @@
             </a:lvl1pPr>
           </a:lstStyle>
           <a:p>
-            <a:fld id="{4B285AA2-A1C5-41B4-8ADF-267E3E4B1679}" type="datetimeFigureOut">
+            <a:fld id="{F6582FEC-1620-427C-8DE5-C470062BED34}" type="datetimeFigureOut">
               <a:rPr lang="en-US" smtClean="0"/>
-              <a:t>6/25/2026</a:t>
+              <a:t>6/26/2026</a:t>
             </a:fld>
             <a:endParaRPr lang="en-US"/>
           </a:p>
@@ -2915,7 +2915,7 @@
           <p:cNvPr id="5" name="Footer Placeholder 4">
             <a:extLst>
               <a:ext uri="{FF2B5EF4-FFF2-40B4-BE49-F238E27FC236}">
-                <a16:creationId xmlns:a16="http://schemas.microsoft.com/office/drawing/2014/main" id="{7612CA81-18E4-AD18-F809-2823938E3E3D}"/>
+                <a16:creationId xmlns:a16="http://schemas.microsoft.com/office/drawing/2014/main" id="{03F55513-32E3-B617-046A-92E5E3D9A779}"/>
               </a:ext>
             </a:extLst>
           </p:cNvPr>
@@ -2958,7 +2958,7 @@
           <p:cNvPr id="6" name="Slide Number Placeholder 5">
             <a:extLst>
               <a:ext uri="{FF2B5EF4-FFF2-40B4-BE49-F238E27FC236}">
-                <a16:creationId xmlns:a16="http://schemas.microsoft.com/office/drawing/2014/main" id="{022752DF-0691-D02A-7A9B-40F1FBE44A0C}"/>
+                <a16:creationId xmlns:a16="http://schemas.microsoft.com/office/drawing/2014/main" id="{A68F5D45-7515-C8A7-CDC7-92655F35B25E}"/>
               </a:ext>
             </a:extLst>
           </p:cNvPr>
@@ -2992,7 +2992,7 @@
             </a:lvl1pPr>
           </a:lstStyle>
           <a:p>
-            <a:fld id="{89220CC8-2F38-4218-9C39-EDF876764042}" type="slidenum">
+            <a:fld id="{FCD4687A-586F-4373-9B75-44E1B3037E08}" type="slidenum">
               <a:rPr lang="en-US" smtClean="0"/>
               <a:t>‹#›</a:t>
             </a:fld>
@@ -3003,7 +3003,7 @@
     </p:spTree>
     <p:extLst>
       <p:ext uri="{BB962C8B-B14F-4D97-AF65-F5344CB8AC3E}">
-        <p14:creationId xmlns:p14="http://schemas.microsoft.com/office/powerpoint/2010/main" val="3985743317"/>
+        <p14:creationId xmlns:p14="http://schemas.microsoft.com/office/powerpoint/2010/main" val="2775047342"/>
       </p:ext>
     </p:extLst>
   </p:cSld>
@@ -3326,7 +3326,7 @@
           <p:cNvPr id="2" name="Rectangle">
             <a:extLst>
               <a:ext uri="{FF2B5EF4-FFF2-40B4-BE49-F238E27FC236}">
-                <a16:creationId xmlns:a16="http://schemas.microsoft.com/office/drawing/2014/main" id="{9F3812C2-FAAD-3F6E-9022-DC3ED0DFF0C5}"/>
+                <a16:creationId xmlns:a16="http://schemas.microsoft.com/office/drawing/2014/main" id="{2629FFA4-0063-5B7F-F938-97B7D6228A80}"/>
               </a:ext>
             </a:extLst>
           </p:cNvPr>
@@ -3387,7 +3387,7 @@
           <p:cNvPr id="3" name="RoundedRect">
             <a:extLst>
               <a:ext uri="{FF2B5EF4-FFF2-40B4-BE49-F238E27FC236}">
-                <a16:creationId xmlns:a16="http://schemas.microsoft.com/office/drawing/2014/main" id="{1777266B-F8AC-F314-406E-79E2FBE6C5E6}"/>
+                <a16:creationId xmlns:a16="http://schemas.microsoft.com/office/drawing/2014/main" id="{AC799BD3-F87D-9AB5-A7B2-5F50DD06484A}"/>
               </a:ext>
             </a:extLst>
           </p:cNvPr>
@@ -3448,7 +3448,7 @@
           <p:cNvPr id="4" name="Ellipse">
             <a:extLst>
               <a:ext uri="{FF2B5EF4-FFF2-40B4-BE49-F238E27FC236}">
-                <a16:creationId xmlns:a16="http://schemas.microsoft.com/office/drawing/2014/main" id="{9C7624CD-BEE9-A9C3-3B10-CDDC87B4763B}"/>
+                <a16:creationId xmlns:a16="http://schemas.microsoft.com/office/drawing/2014/main" id="{79BC7A98-192D-1AEA-753C-BADDEE981645}"/>
               </a:ext>
             </a:extLst>
           </p:cNvPr>
@@ -3509,7 +3509,7 @@
           <p:cNvPr id="5" name="Chevron">
             <a:extLst>
               <a:ext uri="{FF2B5EF4-FFF2-40B4-BE49-F238E27FC236}">
-                <a16:creationId xmlns:a16="http://schemas.microsoft.com/office/drawing/2014/main" id="{C2A79F3E-E6AE-24E1-2796-13137FC48D01}"/>
+                <a16:creationId xmlns:a16="http://schemas.microsoft.com/office/drawing/2014/main" id="{3DA4108A-3F91-ABFD-3D0D-868A37DCC5F1}"/>
               </a:ext>
             </a:extLst>
           </p:cNvPr>
@@ -3568,7 +3568,7 @@
     </p:spTree>
     <p:extLst>
       <p:ext uri="{BB962C8B-B14F-4D97-AF65-F5344CB8AC3E}">
-        <p14:creationId xmlns:p14="http://schemas.microsoft.com/office/powerpoint/2010/main" val="3508049266"/>
+        <p14:creationId xmlns:p14="http://schemas.microsoft.com/office/powerpoint/2010/main" val="742296368"/>
       </p:ext>
     </p:extLst>
   </p:cSld>
